--- a/dns_cache_poisoning.pptx
+++ b/dns_cache_poisoning.pptx
@@ -76,34 +76,7 @@
                 </a:solidFill>
                 <a:latin typeface="Arial"/>
               </a:rPr>
-              <a:t>Click to </a:t>
-            </a:r>
-            <a:r>
-              <a:rPr b="0" lang="en-IN" sz="4400" spc="-1" strike="noStrike">
-                <a:solidFill>
-                  <a:srgbClr val="000000"/>
-                </a:solidFill>
-                <a:latin typeface="Arial"/>
-              </a:rPr>
-              <a:t>move </a:t>
-            </a:r>
-            <a:r>
-              <a:rPr b="0" lang="en-IN" sz="4400" spc="-1" strike="noStrike">
-                <a:solidFill>
-                  <a:srgbClr val="000000"/>
-                </a:solidFill>
-                <a:latin typeface="Arial"/>
-              </a:rPr>
-              <a:t>the </a:t>
-            </a:r>
-            <a:r>
-              <a:rPr b="0" lang="en-IN" sz="4400" spc="-1" strike="noStrike">
-                <a:solidFill>
-                  <a:srgbClr val="000000"/>
-                </a:solidFill>
-                <a:latin typeface="Arial"/>
-              </a:rPr>
-              <a:t>slide</a:t>
+              <a:t>Click to move the slide</a:t>
             </a:r>
             <a:endParaRPr b="0" lang="en-IN" sz="4400" spc="-1" strike="noStrike">
               <a:solidFill>
@@ -374,7 +347,7 @@
             <a:pPr indent="0" algn="r">
               <a:buNone/>
             </a:pPr>
-            <a:fld id="{8B5C1B6A-D2CF-4715-AF58-8F0FDA23412B}" type="slidenum">
+            <a:fld id="{C4F7712C-71B9-4255-9DE8-004CD6AD8537}" type="slidenum">
               <a:rPr b="0" lang="en-IN" sz="1400" spc="-1" strike="noStrike">
                 <a:solidFill>
                   <a:srgbClr val="000000"/>
@@ -428,7 +401,7 @@
         <p:spPr>
           <a:xfrm>
             <a:off x="685800" y="1143000"/>
-            <a:ext cx="5485680" cy="3085560"/>
+            <a:ext cx="5484960" cy="3084840"/>
           </a:xfrm>
           <a:prstGeom prst="rect">
             <a:avLst/>
@@ -451,7 +424,7 @@
         <p:spPr>
           <a:xfrm>
             <a:off x="685800" y="4400640"/>
-            <a:ext cx="5485680" cy="3599640"/>
+            <a:ext cx="5484960" cy="3598920"/>
           </a:xfrm>
           <a:prstGeom prst="rect">
             <a:avLst/>
@@ -491,7 +464,7 @@
         <p:spPr>
           <a:xfrm>
             <a:off x="3884760" y="8685360"/>
-            <a:ext cx="2971080" cy="457920"/>
+            <a:ext cx="2970360" cy="457200"/>
           </a:xfrm>
           <a:prstGeom prst="rect">
             <a:avLst/>
@@ -533,7 +506,7 @@
                 <a:tab algn="l" pos="0"/>
               </a:tabLst>
             </a:pPr>
-            <a:fld id="{A13B963B-BF91-468B-9C5D-0C09ED38DF67}" type="slidenum">
+            <a:fld id="{829B361B-0CED-443C-88AC-AE73EADDD6D5}" type="slidenum">
               <a:rPr b="0" lang="en-US" sz="1200" spc="-1" strike="noStrike">
                 <a:solidFill>
                   <a:schemeClr val="dk1"/>
@@ -587,7 +560,7 @@
         <p:spPr>
           <a:xfrm>
             <a:off x="685800" y="1143000"/>
-            <a:ext cx="5485680" cy="3085560"/>
+            <a:ext cx="5484960" cy="3084840"/>
           </a:xfrm>
           <a:prstGeom prst="rect">
             <a:avLst/>
@@ -610,7 +583,7 @@
         <p:spPr>
           <a:xfrm>
             <a:off x="685800" y="4400640"/>
-            <a:ext cx="5485680" cy="3599640"/>
+            <a:ext cx="5484960" cy="3598920"/>
           </a:xfrm>
           <a:prstGeom prst="rect">
             <a:avLst/>
@@ -650,7 +623,7 @@
         <p:spPr>
           <a:xfrm>
             <a:off x="3884760" y="8685360"/>
-            <a:ext cx="2971080" cy="457920"/>
+            <a:ext cx="2970360" cy="457200"/>
           </a:xfrm>
           <a:prstGeom prst="rect">
             <a:avLst/>
@@ -692,7 +665,7 @@
                 <a:tab algn="l" pos="0"/>
               </a:tabLst>
             </a:pPr>
-            <a:fld id="{681AFE79-1831-45B9-81EF-BF6F9B83FAD6}" type="slidenum">
+            <a:fld id="{FBBE270B-0C6D-4B31-B77E-EA4880B5B509}" type="slidenum">
               <a:rPr b="0" lang="en-US" sz="1200" spc="-1" strike="noStrike">
                 <a:solidFill>
                   <a:schemeClr val="dk1"/>
@@ -746,7 +719,7 @@
         <p:spPr>
           <a:xfrm>
             <a:off x="685800" y="1143000"/>
-            <a:ext cx="5485680" cy="3085560"/>
+            <a:ext cx="5484960" cy="3084840"/>
           </a:xfrm>
           <a:prstGeom prst="rect">
             <a:avLst/>
@@ -769,7 +742,7 @@
         <p:spPr>
           <a:xfrm>
             <a:off x="685800" y="4400640"/>
-            <a:ext cx="5485680" cy="3599640"/>
+            <a:ext cx="5484960" cy="3598920"/>
           </a:xfrm>
           <a:prstGeom prst="rect">
             <a:avLst/>
@@ -809,7 +782,7 @@
         <p:spPr>
           <a:xfrm>
             <a:off x="3884760" y="8685360"/>
-            <a:ext cx="2971080" cy="457920"/>
+            <a:ext cx="2970360" cy="457200"/>
           </a:xfrm>
           <a:prstGeom prst="rect">
             <a:avLst/>
@@ -851,7 +824,7 @@
                 <a:tab algn="l" pos="0"/>
               </a:tabLst>
             </a:pPr>
-            <a:fld id="{2E413277-367D-4C60-BE6D-22A5F4941BDA}" type="slidenum">
+            <a:fld id="{89B88820-F91B-4D91-8547-6716B27B65D6}" type="slidenum">
               <a:rPr b="0" lang="en-US" sz="1200" spc="-1" strike="noStrike">
                 <a:solidFill>
                   <a:schemeClr val="dk1"/>
@@ -905,7 +878,7 @@
         <p:spPr>
           <a:xfrm>
             <a:off x="685800" y="1143000"/>
-            <a:ext cx="5485680" cy="3085560"/>
+            <a:ext cx="5484960" cy="3084840"/>
           </a:xfrm>
           <a:prstGeom prst="rect">
             <a:avLst/>
@@ -928,7 +901,7 @@
         <p:spPr>
           <a:xfrm>
             <a:off x="685800" y="4400640"/>
-            <a:ext cx="5485680" cy="3599640"/>
+            <a:ext cx="5484960" cy="3598920"/>
           </a:xfrm>
           <a:prstGeom prst="rect">
             <a:avLst/>
@@ -968,7 +941,7 @@
         <p:spPr>
           <a:xfrm>
             <a:off x="3884760" y="8685360"/>
-            <a:ext cx="2971080" cy="457920"/>
+            <a:ext cx="2970360" cy="457200"/>
           </a:xfrm>
           <a:prstGeom prst="rect">
             <a:avLst/>
@@ -1010,7 +983,7 @@
                 <a:tab algn="l" pos="0"/>
               </a:tabLst>
             </a:pPr>
-            <a:fld id="{9663D895-DA27-4FC5-B52B-DBAE2C89EC64}" type="slidenum">
+            <a:fld id="{11BBA3AB-B504-4CCD-A93C-B364BACE65B0}" type="slidenum">
               <a:rPr b="0" lang="en-US" sz="1200" spc="-1" strike="noStrike">
                 <a:solidFill>
                   <a:schemeClr val="dk1"/>
@@ -1064,7 +1037,7 @@
         <p:spPr>
           <a:xfrm>
             <a:off x="685800" y="1143000"/>
-            <a:ext cx="5485680" cy="3085560"/>
+            <a:ext cx="5484960" cy="3084840"/>
           </a:xfrm>
           <a:prstGeom prst="rect">
             <a:avLst/>
@@ -1087,7 +1060,7 @@
         <p:spPr>
           <a:xfrm>
             <a:off x="685800" y="4400640"/>
-            <a:ext cx="5485680" cy="3599640"/>
+            <a:ext cx="5484960" cy="3598920"/>
           </a:xfrm>
           <a:prstGeom prst="rect">
             <a:avLst/>
@@ -1127,7 +1100,7 @@
         <p:spPr>
           <a:xfrm>
             <a:off x="3884760" y="8685360"/>
-            <a:ext cx="2971080" cy="457920"/>
+            <a:ext cx="2970360" cy="457200"/>
           </a:xfrm>
           <a:prstGeom prst="rect">
             <a:avLst/>
@@ -1169,7 +1142,7 @@
                 <a:tab algn="l" pos="0"/>
               </a:tabLst>
             </a:pPr>
-            <a:fld id="{1140C924-CA12-4272-B69F-D987BCA38535}" type="slidenum">
+            <a:fld id="{1A1A74F9-0096-42E0-9DFE-2AACBC075717}" type="slidenum">
               <a:rPr b="0" lang="en-US" sz="1200" spc="-1" strike="noStrike">
                 <a:solidFill>
                   <a:schemeClr val="dk1"/>
@@ -1223,7 +1196,7 @@
         <p:spPr>
           <a:xfrm>
             <a:off x="685800" y="1143000"/>
-            <a:ext cx="5485680" cy="3085560"/>
+            <a:ext cx="5484960" cy="3084840"/>
           </a:xfrm>
           <a:prstGeom prst="rect">
             <a:avLst/>
@@ -1246,7 +1219,7 @@
         <p:spPr>
           <a:xfrm>
             <a:off x="685800" y="4400640"/>
-            <a:ext cx="5485680" cy="3599640"/>
+            <a:ext cx="5484960" cy="3598920"/>
           </a:xfrm>
           <a:prstGeom prst="rect">
             <a:avLst/>
@@ -1286,7 +1259,7 @@
         <p:spPr>
           <a:xfrm>
             <a:off x="3884760" y="8685360"/>
-            <a:ext cx="2971080" cy="457920"/>
+            <a:ext cx="2970360" cy="457200"/>
           </a:xfrm>
           <a:prstGeom prst="rect">
             <a:avLst/>
@@ -1328,7 +1301,7 @@
                 <a:tab algn="l" pos="0"/>
               </a:tabLst>
             </a:pPr>
-            <a:fld id="{8E3B13C8-6030-4CA4-AF2D-27124C2F2783}" type="slidenum">
+            <a:fld id="{4068EEDF-C50A-455D-A615-D897CFA06599}" type="slidenum">
               <a:rPr b="0" lang="en-US" sz="1200" spc="-1" strike="noStrike">
                 <a:solidFill>
                   <a:schemeClr val="dk1"/>
@@ -1382,7 +1355,7 @@
         <p:spPr>
           <a:xfrm>
             <a:off x="685800" y="1143000"/>
-            <a:ext cx="5485680" cy="3085560"/>
+            <a:ext cx="5484960" cy="3084840"/>
           </a:xfrm>
           <a:prstGeom prst="rect">
             <a:avLst/>
@@ -1405,7 +1378,7 @@
         <p:spPr>
           <a:xfrm>
             <a:off x="685800" y="4400640"/>
-            <a:ext cx="5485680" cy="3599640"/>
+            <a:ext cx="5484960" cy="3598920"/>
           </a:xfrm>
           <a:prstGeom prst="rect">
             <a:avLst/>
@@ -1445,7 +1418,7 @@
         <p:spPr>
           <a:xfrm>
             <a:off x="3884760" y="8685360"/>
-            <a:ext cx="2971080" cy="457920"/>
+            <a:ext cx="2970360" cy="457200"/>
           </a:xfrm>
           <a:prstGeom prst="rect">
             <a:avLst/>
@@ -1487,7 +1460,7 @@
                 <a:tab algn="l" pos="0"/>
               </a:tabLst>
             </a:pPr>
-            <a:fld id="{FD36D5EF-E3EE-4ABF-BBB8-E83C06F52A0F}" type="slidenum">
+            <a:fld id="{181309C8-7046-4AD3-98F1-CE84AB234C2E}" type="slidenum">
               <a:rPr b="0" lang="en-US" sz="1200" spc="-1" strike="noStrike">
                 <a:solidFill>
                   <a:schemeClr val="dk1"/>
@@ -1541,7 +1514,7 @@
         <p:spPr>
           <a:xfrm>
             <a:off x="685800" y="1143000"/>
-            <a:ext cx="5485680" cy="3085560"/>
+            <a:ext cx="5484960" cy="3084840"/>
           </a:xfrm>
           <a:prstGeom prst="rect">
             <a:avLst/>
@@ -1564,7 +1537,7 @@
         <p:spPr>
           <a:xfrm>
             <a:off x="685800" y="4400640"/>
-            <a:ext cx="5485680" cy="3599640"/>
+            <a:ext cx="5484960" cy="3598920"/>
           </a:xfrm>
           <a:prstGeom prst="rect">
             <a:avLst/>
@@ -1604,7 +1577,7 @@
         <p:spPr>
           <a:xfrm>
             <a:off x="3884760" y="8685360"/>
-            <a:ext cx="2971080" cy="457920"/>
+            <a:ext cx="2970360" cy="457200"/>
           </a:xfrm>
           <a:prstGeom prst="rect">
             <a:avLst/>
@@ -1646,7 +1619,7 @@
                 <a:tab algn="l" pos="0"/>
               </a:tabLst>
             </a:pPr>
-            <a:fld id="{7333C3BA-2630-490B-8217-0B4BF39855BF}" type="slidenum">
+            <a:fld id="{3F3D477C-9251-445D-84AE-57BCA9E0BC37}" type="slidenum">
               <a:rPr b="0" lang="en-US" sz="1200" spc="-1" strike="noStrike">
                 <a:solidFill>
                   <a:schemeClr val="dk1"/>
@@ -1700,7 +1673,7 @@
         <p:spPr>
           <a:xfrm>
             <a:off x="685800" y="1143000"/>
-            <a:ext cx="5485680" cy="3085560"/>
+            <a:ext cx="5484960" cy="3084840"/>
           </a:xfrm>
           <a:prstGeom prst="rect">
             <a:avLst/>
@@ -1723,7 +1696,7 @@
         <p:spPr>
           <a:xfrm>
             <a:off x="685800" y="4400640"/>
-            <a:ext cx="5485680" cy="3599640"/>
+            <a:ext cx="5484960" cy="3598920"/>
           </a:xfrm>
           <a:prstGeom prst="rect">
             <a:avLst/>
@@ -1763,7 +1736,7 @@
         <p:spPr>
           <a:xfrm>
             <a:off x="3884760" y="8685360"/>
-            <a:ext cx="2971080" cy="457920"/>
+            <a:ext cx="2970360" cy="457200"/>
           </a:xfrm>
           <a:prstGeom prst="rect">
             <a:avLst/>
@@ -1805,7 +1778,7 @@
                 <a:tab algn="l" pos="0"/>
               </a:tabLst>
             </a:pPr>
-            <a:fld id="{A42B9779-B73C-4497-A167-026A69B9BD09}" type="slidenum">
+            <a:fld id="{360C9B6B-5DA8-41A0-9FBC-CE5DE88C5039}" type="slidenum">
               <a:rPr b="0" lang="en-US" sz="1200" spc="-1" strike="noStrike">
                 <a:solidFill>
                   <a:schemeClr val="dk1"/>
@@ -2191,7 +2164,7 @@
         <p:spPr>
           <a:xfrm>
             <a:off x="0" y="0"/>
-            <a:ext cx="3748320" cy="5142960"/>
+            <a:ext cx="3747600" cy="5142240"/>
           </a:xfrm>
           <a:prstGeom prst="rect">
             <a:avLst/>
@@ -2240,7 +2213,7 @@
         <p:spPr>
           <a:xfrm>
             <a:off x="3749040" y="0"/>
-            <a:ext cx="49680" cy="5142960"/>
+            <a:ext cx="48960" cy="5142240"/>
           </a:xfrm>
           <a:prstGeom prst="rect">
             <a:avLst/>
@@ -2289,7 +2262,7 @@
         <p:spPr>
           <a:xfrm>
             <a:off x="384120" y="777240"/>
-            <a:ext cx="3108240" cy="273600"/>
+            <a:ext cx="3107520" cy="272880"/>
           </a:xfrm>
           <a:prstGeom prst="rect">
             <a:avLst/>
@@ -2319,7 +2292,7 @@
               </a:tabLst>
             </a:pPr>
             <a:r>
-              <a:rPr b="1" lang="en-US" sz="900" spc="197" strike="noStrike">
+              <a:rPr b="1" lang="en-US" sz="900" spc="191" strike="noStrike">
                 <a:solidFill>
                   <a:srgbClr val="3b82f6"/>
                 </a:solidFill>
@@ -2346,7 +2319,7 @@
         <p:spPr>
           <a:xfrm>
             <a:off x="384120" y="1115640"/>
-            <a:ext cx="3108240" cy="273600"/>
+            <a:ext cx="3107520" cy="272880"/>
           </a:xfrm>
           <a:prstGeom prst="rect">
             <a:avLst/>
@@ -2403,7 +2376,7 @@
         <p:spPr>
           <a:xfrm>
             <a:off x="384120" y="1572840"/>
-            <a:ext cx="3199680" cy="1553760"/>
+            <a:ext cx="3198960" cy="1553040"/>
           </a:xfrm>
           <a:prstGeom prst="rect">
             <a:avLst/>
@@ -2486,7 +2459,7 @@
         <p:spPr>
           <a:xfrm>
             <a:off x="384120" y="4663440"/>
-            <a:ext cx="127440" cy="127440"/>
+            <a:ext cx="126720" cy="126720"/>
           </a:xfrm>
           <a:prstGeom prst="ellipse">
             <a:avLst/>
@@ -2539,7 +2512,7 @@
         <p:spPr>
           <a:xfrm>
             <a:off x="859680" y="4663440"/>
-            <a:ext cx="127440" cy="127440"/>
+            <a:ext cx="126720" cy="126720"/>
           </a:xfrm>
           <a:prstGeom prst="ellipse">
             <a:avLst/>
@@ -2592,7 +2565,7 @@
         <p:spPr>
           <a:xfrm>
             <a:off x="1334880" y="4663440"/>
-            <a:ext cx="127440" cy="127440"/>
+            <a:ext cx="126720" cy="126720"/>
           </a:xfrm>
           <a:prstGeom prst="ellipse">
             <a:avLst/>
@@ -2645,7 +2618,7 @@
         <p:spPr>
           <a:xfrm>
             <a:off x="1810440" y="4663440"/>
-            <a:ext cx="127440" cy="127440"/>
+            <a:ext cx="126720" cy="126720"/>
           </a:xfrm>
           <a:prstGeom prst="ellipse">
             <a:avLst/>
@@ -2698,7 +2671,7 @@
         <p:spPr>
           <a:xfrm>
             <a:off x="4041720" y="1097280"/>
-            <a:ext cx="4754160" cy="456480"/>
+            <a:ext cx="4753440" cy="455760"/>
           </a:xfrm>
           <a:prstGeom prst="rect">
             <a:avLst/>
@@ -2755,7 +2728,7 @@
         <p:spPr>
           <a:xfrm>
             <a:off x="4041720" y="1691640"/>
-            <a:ext cx="4754160" cy="867960"/>
+            <a:ext cx="4753440" cy="867240"/>
           </a:xfrm>
           <a:prstGeom prst="rect">
             <a:avLst/>
@@ -2864,7 +2837,7 @@
         <p:spPr>
           <a:xfrm>
             <a:off x="4041720" y="2697480"/>
-            <a:ext cx="4662720" cy="26640"/>
+            <a:ext cx="4662000" cy="25920"/>
           </a:xfrm>
           <a:prstGeom prst="rect">
             <a:avLst/>
@@ -2913,7 +2886,7 @@
         <p:spPr>
           <a:xfrm>
             <a:off x="4041720" y="2834640"/>
-            <a:ext cx="4754160" cy="1233720"/>
+            <a:ext cx="4753440" cy="1233000"/>
           </a:xfrm>
           <a:prstGeom prst="rect">
             <a:avLst/>
@@ -2962,7 +2935,7 @@
         <p:spPr>
           <a:xfrm>
             <a:off x="4041720" y="2834640"/>
-            <a:ext cx="54000" cy="1233720"/>
+            <a:ext cx="53280" cy="1233000"/>
           </a:xfrm>
           <a:prstGeom prst="rect">
             <a:avLst/>
@@ -3011,7 +2984,7 @@
         <p:spPr>
           <a:xfrm>
             <a:off x="4251960" y="2907720"/>
-            <a:ext cx="4388400" cy="255240"/>
+            <a:ext cx="4387680" cy="254520"/>
           </a:xfrm>
           <a:prstGeom prst="rect">
             <a:avLst/>
@@ -3068,7 +3041,7 @@
         <p:spPr>
           <a:xfrm>
             <a:off x="4251960" y="3200400"/>
-            <a:ext cx="4434120" cy="776520"/>
+            <a:ext cx="4433400" cy="775800"/>
           </a:xfrm>
           <a:prstGeom prst="rect">
             <a:avLst/>
@@ -3125,7 +3098,7 @@
         <p:spPr>
           <a:xfrm>
             <a:off x="4041720" y="4224600"/>
-            <a:ext cx="4571280" cy="273600"/>
+            <a:ext cx="4570560" cy="272880"/>
           </a:xfrm>
           <a:prstGeom prst="rect">
             <a:avLst/>
@@ -3172,7 +3145,7 @@
                 <a:latin typeface="Calibri"/>
                 <a:ea typeface="Calibri"/>
               </a:rPr>
-              <a:t>Dhruv, Krishiv, Ujjwal, Sayuj</a:t>
+              <a:t>Dhruv, Krishiv, Ujjwal, Sayuj, Nikhat</a:t>
             </a:r>
             <a:endParaRPr b="0" lang="en-IN" sz="1100" spc="-1" strike="noStrike">
               <a:solidFill>
@@ -3229,7 +3202,7 @@
         <p:spPr>
           <a:xfrm>
             <a:off x="0" y="0"/>
-            <a:ext cx="9143280" cy="657720"/>
+            <a:ext cx="9142560" cy="657000"/>
           </a:xfrm>
           <a:prstGeom prst="rect">
             <a:avLst/>
@@ -3278,7 +3251,7 @@
         <p:spPr>
           <a:xfrm>
             <a:off x="274320" y="91440"/>
-            <a:ext cx="410760" cy="474840"/>
+            <a:ext cx="410040" cy="474120"/>
           </a:xfrm>
           <a:prstGeom prst="rect">
             <a:avLst/>
@@ -3335,7 +3308,7 @@
         <p:spPr>
           <a:xfrm>
             <a:off x="804600" y="64080"/>
-            <a:ext cx="8046000" cy="346680"/>
+            <a:ext cx="8045280" cy="345960"/>
           </a:xfrm>
           <a:prstGeom prst="rect">
             <a:avLst/>
@@ -3392,7 +3365,7 @@
         <p:spPr>
           <a:xfrm>
             <a:off x="365760" y="804600"/>
-            <a:ext cx="4114080" cy="1901160"/>
+            <a:ext cx="4113360" cy="1900440"/>
           </a:xfrm>
           <a:prstGeom prst="rect">
             <a:avLst/>
@@ -3441,7 +3414,7 @@
         <p:spPr>
           <a:xfrm>
             <a:off x="365760" y="804600"/>
-            <a:ext cx="54000" cy="1901160"/>
+            <a:ext cx="53280" cy="1900440"/>
           </a:xfrm>
           <a:prstGeom prst="rect">
             <a:avLst/>
@@ -3490,7 +3463,7 @@
         <p:spPr>
           <a:xfrm>
             <a:off x="567000" y="877680"/>
-            <a:ext cx="3748320" cy="273600"/>
+            <a:ext cx="3747600" cy="272880"/>
           </a:xfrm>
           <a:prstGeom prst="rect">
             <a:avLst/>
@@ -3547,7 +3520,7 @@
         <p:spPr>
           <a:xfrm>
             <a:off x="567000" y="1261800"/>
-            <a:ext cx="182160" cy="182160"/>
+            <a:ext cx="181440" cy="181440"/>
           </a:xfrm>
           <a:prstGeom prst="ellipse">
             <a:avLst/>
@@ -3596,7 +3569,7 @@
         <p:spPr>
           <a:xfrm>
             <a:off x="822960" y="1234440"/>
-            <a:ext cx="3474000" cy="200520"/>
+            <a:ext cx="3473280" cy="199800"/>
           </a:xfrm>
           <a:prstGeom prst="rect">
             <a:avLst/>
@@ -3653,7 +3626,7 @@
         <p:spPr>
           <a:xfrm>
             <a:off x="567000" y="1627560"/>
-            <a:ext cx="182160" cy="182160"/>
+            <a:ext cx="181440" cy="181440"/>
           </a:xfrm>
           <a:prstGeom prst="ellipse">
             <a:avLst/>
@@ -3702,7 +3675,7 @@
         <p:spPr>
           <a:xfrm>
             <a:off x="822960" y="1600200"/>
-            <a:ext cx="3474000" cy="200520"/>
+            <a:ext cx="3473280" cy="199800"/>
           </a:xfrm>
           <a:prstGeom prst="rect">
             <a:avLst/>
@@ -3759,7 +3732,7 @@
         <p:spPr>
           <a:xfrm>
             <a:off x="567000" y="1993320"/>
-            <a:ext cx="182160" cy="182160"/>
+            <a:ext cx="181440" cy="181440"/>
           </a:xfrm>
           <a:prstGeom prst="ellipse">
             <a:avLst/>
@@ -3808,7 +3781,7 @@
         <p:spPr>
           <a:xfrm>
             <a:off x="822960" y="1965960"/>
-            <a:ext cx="3474000" cy="200520"/>
+            <a:ext cx="3473280" cy="199800"/>
           </a:xfrm>
           <a:prstGeom prst="rect">
             <a:avLst/>
@@ -3865,7 +3838,7 @@
         <p:spPr>
           <a:xfrm>
             <a:off x="567000" y="2359080"/>
-            <a:ext cx="182160" cy="182160"/>
+            <a:ext cx="181440" cy="181440"/>
           </a:xfrm>
           <a:prstGeom prst="ellipse">
             <a:avLst/>
@@ -3914,7 +3887,7 @@
         <p:spPr>
           <a:xfrm>
             <a:off x="822960" y="2331720"/>
-            <a:ext cx="3474000" cy="200520"/>
+            <a:ext cx="3473280" cy="199800"/>
           </a:xfrm>
           <a:prstGeom prst="rect">
             <a:avLst/>
@@ -3971,7 +3944,7 @@
         <p:spPr>
           <a:xfrm>
             <a:off x="4663440" y="804600"/>
-            <a:ext cx="4114080" cy="1901160"/>
+            <a:ext cx="4113360" cy="1900440"/>
           </a:xfrm>
           <a:prstGeom prst="rect">
             <a:avLst/>
@@ -4020,7 +3993,7 @@
         <p:spPr>
           <a:xfrm>
             <a:off x="4663440" y="804600"/>
-            <a:ext cx="54000" cy="1901160"/>
+            <a:ext cx="53280" cy="1900440"/>
           </a:xfrm>
           <a:prstGeom prst="rect">
             <a:avLst/>
@@ -4069,7 +4042,7 @@
         <p:spPr>
           <a:xfrm>
             <a:off x="4864680" y="877680"/>
-            <a:ext cx="3748320" cy="273600"/>
+            <a:ext cx="3747600" cy="272880"/>
           </a:xfrm>
           <a:prstGeom prst="rect">
             <a:avLst/>
@@ -4126,7 +4099,7 @@
         <p:spPr>
           <a:xfrm>
             <a:off x="4864680" y="1261800"/>
-            <a:ext cx="182160" cy="182160"/>
+            <a:ext cx="181440" cy="181440"/>
           </a:xfrm>
           <a:prstGeom prst="ellipse">
             <a:avLst/>
@@ -4175,7 +4148,7 @@
         <p:spPr>
           <a:xfrm>
             <a:off x="5120640" y="1234440"/>
-            <a:ext cx="3474000" cy="200520"/>
+            <a:ext cx="3473280" cy="199800"/>
           </a:xfrm>
           <a:prstGeom prst="rect">
             <a:avLst/>
@@ -4232,7 +4205,7 @@
         <p:spPr>
           <a:xfrm>
             <a:off x="4864680" y="1627560"/>
-            <a:ext cx="182160" cy="182160"/>
+            <a:ext cx="181440" cy="181440"/>
           </a:xfrm>
           <a:prstGeom prst="ellipse">
             <a:avLst/>
@@ -4281,7 +4254,7 @@
         <p:spPr>
           <a:xfrm>
             <a:off x="5120640" y="1600200"/>
-            <a:ext cx="3474000" cy="200520"/>
+            <a:ext cx="3473280" cy="199800"/>
           </a:xfrm>
           <a:prstGeom prst="rect">
             <a:avLst/>
@@ -4338,7 +4311,7 @@
         <p:spPr>
           <a:xfrm>
             <a:off x="4864680" y="1993320"/>
-            <a:ext cx="182160" cy="182160"/>
+            <a:ext cx="181440" cy="181440"/>
           </a:xfrm>
           <a:prstGeom prst="ellipse">
             <a:avLst/>
@@ -4387,7 +4360,7 @@
         <p:spPr>
           <a:xfrm>
             <a:off x="5120640" y="1965960"/>
-            <a:ext cx="3474000" cy="200520"/>
+            <a:ext cx="3473280" cy="199800"/>
           </a:xfrm>
           <a:prstGeom prst="rect">
             <a:avLst/>
@@ -4444,7 +4417,7 @@
         <p:spPr>
           <a:xfrm>
             <a:off x="4864680" y="2359080"/>
-            <a:ext cx="182160" cy="182160"/>
+            <a:ext cx="181440" cy="181440"/>
           </a:xfrm>
           <a:prstGeom prst="ellipse">
             <a:avLst/>
@@ -4493,7 +4466,7 @@
         <p:spPr>
           <a:xfrm>
             <a:off x="5120640" y="2331720"/>
-            <a:ext cx="3474000" cy="200520"/>
+            <a:ext cx="3473280" cy="199800"/>
           </a:xfrm>
           <a:prstGeom prst="rect">
             <a:avLst/>
@@ -4550,7 +4523,7 @@
         <p:spPr>
           <a:xfrm>
             <a:off x="365760" y="2853000"/>
-            <a:ext cx="8411760" cy="593640"/>
+            <a:ext cx="8411040" cy="592920"/>
           </a:xfrm>
           <a:prstGeom prst="rect">
             <a:avLst/>
@@ -4599,7 +4572,7 @@
         <p:spPr>
           <a:xfrm>
             <a:off x="365760" y="2853000"/>
-            <a:ext cx="54000" cy="593640"/>
+            <a:ext cx="53280" cy="592920"/>
           </a:xfrm>
           <a:prstGeom prst="rect">
             <a:avLst/>
@@ -4648,7 +4621,7 @@
         <p:spPr>
           <a:xfrm>
             <a:off x="567000" y="2853000"/>
-            <a:ext cx="1188000" cy="593640"/>
+            <a:ext cx="1187280" cy="592920"/>
           </a:xfrm>
           <a:prstGeom prst="rect">
             <a:avLst/>
@@ -4705,7 +4678,7 @@
         <p:spPr>
           <a:xfrm>
             <a:off x="1920240" y="2853000"/>
-            <a:ext cx="6674400" cy="593640"/>
+            <a:ext cx="6673680" cy="592920"/>
           </a:xfrm>
           <a:prstGeom prst="rect">
             <a:avLst/>
@@ -4762,7 +4735,7 @@
         <p:spPr>
           <a:xfrm>
             <a:off x="365760" y="3611880"/>
-            <a:ext cx="8411760" cy="867960"/>
+            <a:ext cx="8411040" cy="867240"/>
           </a:xfrm>
           <a:prstGeom prst="rect">
             <a:avLst/>
@@ -4811,7 +4784,7 @@
         <p:spPr>
           <a:xfrm>
             <a:off x="365760" y="3611880"/>
-            <a:ext cx="54000" cy="867960"/>
+            <a:ext cx="53280" cy="867240"/>
           </a:xfrm>
           <a:prstGeom prst="rect">
             <a:avLst/>
@@ -4860,7 +4833,7 @@
         <p:spPr>
           <a:xfrm>
             <a:off x="567000" y="3675960"/>
-            <a:ext cx="7954560" cy="255240"/>
+            <a:ext cx="7953840" cy="254520"/>
           </a:xfrm>
           <a:prstGeom prst="rect">
             <a:avLst/>
@@ -4917,7 +4890,7 @@
         <p:spPr>
           <a:xfrm>
             <a:off x="567000" y="3959280"/>
-            <a:ext cx="7954560" cy="456480"/>
+            <a:ext cx="7953840" cy="455760"/>
           </a:xfrm>
           <a:prstGeom prst="rect">
             <a:avLst/>
@@ -4974,7 +4947,7 @@
         <p:spPr>
           <a:xfrm>
             <a:off x="0" y="4937760"/>
-            <a:ext cx="9143280" cy="205200"/>
+            <a:ext cx="9142560" cy="204480"/>
           </a:xfrm>
           <a:prstGeom prst="rect">
             <a:avLst/>
@@ -5023,7 +4996,7 @@
         <p:spPr>
           <a:xfrm>
             <a:off x="365760" y="4937760"/>
-            <a:ext cx="8411760" cy="205200"/>
+            <a:ext cx="8411040" cy="204480"/>
           </a:xfrm>
           <a:prstGeom prst="rect">
             <a:avLst/>
@@ -5117,7 +5090,7 @@
         <p:spPr>
           <a:xfrm>
             <a:off x="0" y="0"/>
-            <a:ext cx="9143280" cy="657720"/>
+            <a:ext cx="9142560" cy="657000"/>
           </a:xfrm>
           <a:prstGeom prst="rect">
             <a:avLst/>
@@ -5166,7 +5139,7 @@
         <p:spPr>
           <a:xfrm>
             <a:off x="274320" y="91440"/>
-            <a:ext cx="410760" cy="474840"/>
+            <a:ext cx="410040" cy="474120"/>
           </a:xfrm>
           <a:prstGeom prst="rect">
             <a:avLst/>
@@ -5223,7 +5196,7 @@
         <p:spPr>
           <a:xfrm>
             <a:off x="804600" y="64080"/>
-            <a:ext cx="8046000" cy="346680"/>
+            <a:ext cx="8045280" cy="345960"/>
           </a:xfrm>
           <a:prstGeom prst="rect">
             <a:avLst/>
@@ -5260,7 +5233,7 @@
                 <a:latin typeface="Calibri"/>
                 <a:ea typeface="Calibri"/>
               </a:rPr>
-              <a:t>Lab Setup — The Complete Architecture</a:t>
+              <a:t>Lab Setup - The Complete Architecture</a:t>
             </a:r>
             <a:endParaRPr b="0" lang="en-IN" sz="2000" spc="-1" strike="noStrike">
               <a:solidFill>
@@ -5280,7 +5253,7 @@
         <p:spPr>
           <a:xfrm>
             <a:off x="804600" y="402480"/>
-            <a:ext cx="8046000" cy="227880"/>
+            <a:ext cx="8045280" cy="227160"/>
           </a:xfrm>
           <a:prstGeom prst="rect">
             <a:avLst/>
@@ -5337,7 +5310,7 @@
         <p:spPr>
           <a:xfrm>
             <a:off x="365760" y="804600"/>
-            <a:ext cx="8411760" cy="328320"/>
+            <a:ext cx="8411040" cy="327600"/>
           </a:xfrm>
           <a:prstGeom prst="rect">
             <a:avLst/>
@@ -5386,7 +5359,7 @@
         <p:spPr>
           <a:xfrm>
             <a:off x="457200" y="804600"/>
-            <a:ext cx="365040" cy="328320"/>
+            <a:ext cx="364320" cy="327600"/>
           </a:xfrm>
           <a:prstGeom prst="rect">
             <a:avLst/>
@@ -5443,7 +5416,7 @@
         <p:spPr>
           <a:xfrm>
             <a:off x="960120" y="804600"/>
-            <a:ext cx="2148120" cy="328320"/>
+            <a:ext cx="2147400" cy="327600"/>
           </a:xfrm>
           <a:prstGeom prst="rect">
             <a:avLst/>
@@ -5500,7 +5473,7 @@
         <p:spPr>
           <a:xfrm>
             <a:off x="3246120" y="804600"/>
-            <a:ext cx="1370880" cy="328320"/>
+            <a:ext cx="1370160" cy="327600"/>
           </a:xfrm>
           <a:prstGeom prst="rect">
             <a:avLst/>
@@ -5557,7 +5530,7 @@
         <p:spPr>
           <a:xfrm>
             <a:off x="4709160" y="804600"/>
-            <a:ext cx="3885480" cy="328320"/>
+            <a:ext cx="3884760" cy="327600"/>
           </a:xfrm>
           <a:prstGeom prst="rect">
             <a:avLst/>
@@ -5614,7 +5587,7 @@
         <p:spPr>
           <a:xfrm>
             <a:off x="365760" y="1188720"/>
-            <a:ext cx="8411760" cy="493200"/>
+            <a:ext cx="8411040" cy="492480"/>
           </a:xfrm>
           <a:prstGeom prst="rect">
             <a:avLst/>
@@ -5663,7 +5636,7 @@
         <p:spPr>
           <a:xfrm>
             <a:off x="457200" y="1188720"/>
-            <a:ext cx="365040" cy="493200"/>
+            <a:ext cx="364320" cy="492480"/>
           </a:xfrm>
           <a:prstGeom prst="rect">
             <a:avLst/>
@@ -5720,7 +5693,7 @@
         <p:spPr>
           <a:xfrm>
             <a:off x="960120" y="1188720"/>
-            <a:ext cx="2148120" cy="493200"/>
+            <a:ext cx="2147400" cy="492480"/>
           </a:xfrm>
           <a:prstGeom prst="rect">
             <a:avLst/>
@@ -5777,7 +5750,7 @@
         <p:spPr>
           <a:xfrm>
             <a:off x="3246120" y="1188720"/>
-            <a:ext cx="1370880" cy="493200"/>
+            <a:ext cx="1370160" cy="492480"/>
           </a:xfrm>
           <a:prstGeom prst="rect">
             <a:avLst/>
@@ -5834,7 +5807,7 @@
         <p:spPr>
           <a:xfrm>
             <a:off x="4709160" y="1188720"/>
-            <a:ext cx="3885480" cy="493200"/>
+            <a:ext cx="3884760" cy="492480"/>
           </a:xfrm>
           <a:prstGeom prst="rect">
             <a:avLst/>
@@ -5891,7 +5864,7 @@
         <p:spPr>
           <a:xfrm>
             <a:off x="365760" y="1737360"/>
-            <a:ext cx="8411760" cy="493200"/>
+            <a:ext cx="8411040" cy="492480"/>
           </a:xfrm>
           <a:prstGeom prst="rect">
             <a:avLst/>
@@ -5940,7 +5913,7 @@
         <p:spPr>
           <a:xfrm>
             <a:off x="457200" y="1737360"/>
-            <a:ext cx="365040" cy="493200"/>
+            <a:ext cx="364320" cy="492480"/>
           </a:xfrm>
           <a:prstGeom prst="rect">
             <a:avLst/>
@@ -5997,7 +5970,7 @@
         <p:spPr>
           <a:xfrm>
             <a:off x="960120" y="1737360"/>
-            <a:ext cx="2148120" cy="493200"/>
+            <a:ext cx="2147400" cy="492480"/>
           </a:xfrm>
           <a:prstGeom prst="rect">
             <a:avLst/>
@@ -6054,7 +6027,7 @@
         <p:spPr>
           <a:xfrm>
             <a:off x="3246120" y="1737360"/>
-            <a:ext cx="1370880" cy="493200"/>
+            <a:ext cx="1370160" cy="492480"/>
           </a:xfrm>
           <a:prstGeom prst="rect">
             <a:avLst/>
@@ -6111,7 +6084,7 @@
         <p:spPr>
           <a:xfrm>
             <a:off x="4709160" y="1737360"/>
-            <a:ext cx="3885480" cy="493200"/>
+            <a:ext cx="3884760" cy="492480"/>
           </a:xfrm>
           <a:prstGeom prst="rect">
             <a:avLst/>
@@ -6168,7 +6141,7 @@
         <p:spPr>
           <a:xfrm>
             <a:off x="365760" y="2286000"/>
-            <a:ext cx="8411760" cy="493200"/>
+            <a:ext cx="8411040" cy="492480"/>
           </a:xfrm>
           <a:prstGeom prst="rect">
             <a:avLst/>
@@ -6217,7 +6190,7 @@
         <p:spPr>
           <a:xfrm>
             <a:off x="457200" y="2286000"/>
-            <a:ext cx="365040" cy="493200"/>
+            <a:ext cx="364320" cy="492480"/>
           </a:xfrm>
           <a:prstGeom prst="rect">
             <a:avLst/>
@@ -6274,7 +6247,7 @@
         <p:spPr>
           <a:xfrm>
             <a:off x="960120" y="2286000"/>
-            <a:ext cx="2148120" cy="493200"/>
+            <a:ext cx="2147400" cy="492480"/>
           </a:xfrm>
           <a:prstGeom prst="rect">
             <a:avLst/>
@@ -6331,7 +6304,7 @@
         <p:spPr>
           <a:xfrm>
             <a:off x="3246120" y="2286000"/>
-            <a:ext cx="1370880" cy="493200"/>
+            <a:ext cx="1370160" cy="492480"/>
           </a:xfrm>
           <a:prstGeom prst="rect">
             <a:avLst/>
@@ -6388,7 +6361,7 @@
         <p:spPr>
           <a:xfrm>
             <a:off x="4709160" y="2286000"/>
-            <a:ext cx="3885480" cy="493200"/>
+            <a:ext cx="3884760" cy="492480"/>
           </a:xfrm>
           <a:prstGeom prst="rect">
             <a:avLst/>
@@ -6445,7 +6418,7 @@
         <p:spPr>
           <a:xfrm>
             <a:off x="365760" y="2834640"/>
-            <a:ext cx="8411760" cy="493200"/>
+            <a:ext cx="8411040" cy="492480"/>
           </a:xfrm>
           <a:prstGeom prst="rect">
             <a:avLst/>
@@ -6494,7 +6467,7 @@
         <p:spPr>
           <a:xfrm>
             <a:off x="457200" y="2834640"/>
-            <a:ext cx="365040" cy="493200"/>
+            <a:ext cx="364320" cy="492480"/>
           </a:xfrm>
           <a:prstGeom prst="rect">
             <a:avLst/>
@@ -6551,7 +6524,7 @@
         <p:spPr>
           <a:xfrm>
             <a:off x="960120" y="2834640"/>
-            <a:ext cx="2148120" cy="493200"/>
+            <a:ext cx="2147400" cy="492480"/>
           </a:xfrm>
           <a:prstGeom prst="rect">
             <a:avLst/>
@@ -6608,7 +6581,7 @@
         <p:spPr>
           <a:xfrm>
             <a:off x="3246120" y="2834640"/>
-            <a:ext cx="1370880" cy="493200"/>
+            <a:ext cx="1370160" cy="492480"/>
           </a:xfrm>
           <a:prstGeom prst="rect">
             <a:avLst/>
@@ -6665,7 +6638,7 @@
         <p:spPr>
           <a:xfrm>
             <a:off x="4709160" y="2834640"/>
-            <a:ext cx="3885480" cy="493200"/>
+            <a:ext cx="3884760" cy="492480"/>
           </a:xfrm>
           <a:prstGeom prst="rect">
             <a:avLst/>
@@ -6722,7 +6695,7 @@
         <p:spPr>
           <a:xfrm>
             <a:off x="365760" y="3383280"/>
-            <a:ext cx="8411760" cy="493200"/>
+            <a:ext cx="8411040" cy="492480"/>
           </a:xfrm>
           <a:prstGeom prst="rect">
             <a:avLst/>
@@ -6771,7 +6744,7 @@
         <p:spPr>
           <a:xfrm>
             <a:off x="457200" y="3383280"/>
-            <a:ext cx="365040" cy="493200"/>
+            <a:ext cx="364320" cy="492480"/>
           </a:xfrm>
           <a:prstGeom prst="rect">
             <a:avLst/>
@@ -6828,7 +6801,7 @@
         <p:spPr>
           <a:xfrm>
             <a:off x="960120" y="3383280"/>
-            <a:ext cx="2148120" cy="493200"/>
+            <a:ext cx="2147400" cy="492480"/>
           </a:xfrm>
           <a:prstGeom prst="rect">
             <a:avLst/>
@@ -6885,7 +6858,7 @@
         <p:spPr>
           <a:xfrm>
             <a:off x="3246120" y="3383280"/>
-            <a:ext cx="1370880" cy="493200"/>
+            <a:ext cx="1370160" cy="492480"/>
           </a:xfrm>
           <a:prstGeom prst="rect">
             <a:avLst/>
@@ -6942,7 +6915,7 @@
         <p:spPr>
           <a:xfrm>
             <a:off x="4709160" y="3383280"/>
-            <a:ext cx="3885480" cy="493200"/>
+            <a:ext cx="3884760" cy="492480"/>
           </a:xfrm>
           <a:prstGeom prst="rect">
             <a:avLst/>
@@ -6999,7 +6972,7 @@
         <p:spPr>
           <a:xfrm>
             <a:off x="365760" y="3931920"/>
-            <a:ext cx="8411760" cy="493200"/>
+            <a:ext cx="8411040" cy="492480"/>
           </a:xfrm>
           <a:prstGeom prst="rect">
             <a:avLst/>
@@ -7048,7 +7021,7 @@
         <p:spPr>
           <a:xfrm>
             <a:off x="457200" y="3931920"/>
-            <a:ext cx="365040" cy="493200"/>
+            <a:ext cx="364320" cy="492480"/>
           </a:xfrm>
           <a:prstGeom prst="rect">
             <a:avLst/>
@@ -7105,7 +7078,7 @@
         <p:spPr>
           <a:xfrm>
             <a:off x="960120" y="3931920"/>
-            <a:ext cx="2148120" cy="493200"/>
+            <a:ext cx="2147400" cy="492480"/>
           </a:xfrm>
           <a:prstGeom prst="rect">
             <a:avLst/>
@@ -7162,7 +7135,7 @@
         <p:spPr>
           <a:xfrm>
             <a:off x="3246120" y="3931920"/>
-            <a:ext cx="1370880" cy="493200"/>
+            <a:ext cx="1370160" cy="492480"/>
           </a:xfrm>
           <a:prstGeom prst="rect">
             <a:avLst/>
@@ -7219,7 +7192,7 @@
         <p:spPr>
           <a:xfrm>
             <a:off x="4709160" y="3931920"/>
-            <a:ext cx="3885480" cy="493200"/>
+            <a:ext cx="3884760" cy="492480"/>
           </a:xfrm>
           <a:prstGeom prst="rect">
             <a:avLst/>
@@ -7276,7 +7249,7 @@
         <p:spPr>
           <a:xfrm>
             <a:off x="365760" y="4480560"/>
-            <a:ext cx="8411760" cy="493200"/>
+            <a:ext cx="8411040" cy="492480"/>
           </a:xfrm>
           <a:prstGeom prst="rect">
             <a:avLst/>
@@ -7325,7 +7298,7 @@
         <p:spPr>
           <a:xfrm>
             <a:off x="457200" y="4480560"/>
-            <a:ext cx="365040" cy="493200"/>
+            <a:ext cx="364320" cy="492480"/>
           </a:xfrm>
           <a:prstGeom prst="rect">
             <a:avLst/>
@@ -7382,7 +7355,7 @@
         <p:spPr>
           <a:xfrm>
             <a:off x="960120" y="4480560"/>
-            <a:ext cx="2148120" cy="493200"/>
+            <a:ext cx="2147400" cy="492480"/>
           </a:xfrm>
           <a:prstGeom prst="rect">
             <a:avLst/>
@@ -7439,7 +7412,7 @@
         <p:spPr>
           <a:xfrm>
             <a:off x="3246120" y="4480560"/>
-            <a:ext cx="1370880" cy="493200"/>
+            <a:ext cx="1370160" cy="492480"/>
           </a:xfrm>
           <a:prstGeom prst="rect">
             <a:avLst/>
@@ -7496,7 +7469,7 @@
         <p:spPr>
           <a:xfrm>
             <a:off x="4709160" y="4480560"/>
-            <a:ext cx="3885480" cy="493200"/>
+            <a:ext cx="3884760" cy="492480"/>
           </a:xfrm>
           <a:prstGeom prst="rect">
             <a:avLst/>
@@ -7553,7 +7526,7 @@
         <p:spPr>
           <a:xfrm>
             <a:off x="0" y="4937760"/>
-            <a:ext cx="9143280" cy="205200"/>
+            <a:ext cx="9142560" cy="204480"/>
           </a:xfrm>
           <a:prstGeom prst="rect">
             <a:avLst/>
@@ -7602,7 +7575,7 @@
         <p:spPr>
           <a:xfrm>
             <a:off x="365760" y="4937760"/>
-            <a:ext cx="8411760" cy="205200"/>
+            <a:ext cx="8411040" cy="204480"/>
           </a:xfrm>
           <a:prstGeom prst="rect">
             <a:avLst/>
@@ -7696,7 +7669,7 @@
         <p:spPr>
           <a:xfrm>
             <a:off x="0" y="0"/>
-            <a:ext cx="9143280" cy="657720"/>
+            <a:ext cx="9142560" cy="657000"/>
           </a:xfrm>
           <a:prstGeom prst="rect">
             <a:avLst/>
@@ -7745,7 +7718,7 @@
         <p:spPr>
           <a:xfrm>
             <a:off x="274320" y="91440"/>
-            <a:ext cx="410760" cy="474840"/>
+            <a:ext cx="410040" cy="474120"/>
           </a:xfrm>
           <a:prstGeom prst="rect">
             <a:avLst/>
@@ -7802,7 +7775,7 @@
         <p:spPr>
           <a:xfrm>
             <a:off x="804600" y="64080"/>
-            <a:ext cx="8046000" cy="346680"/>
+            <a:ext cx="8045280" cy="345960"/>
           </a:xfrm>
           <a:prstGeom prst="rect">
             <a:avLst/>
@@ -7859,7 +7832,7 @@
         <p:spPr>
           <a:xfrm>
             <a:off x="804600" y="402480"/>
-            <a:ext cx="8046000" cy="227880"/>
+            <a:ext cx="8045280" cy="227160"/>
           </a:xfrm>
           <a:prstGeom prst="rect">
             <a:avLst/>
@@ -7916,7 +7889,7 @@
         <p:spPr>
           <a:xfrm>
             <a:off x="365760" y="777240"/>
-            <a:ext cx="8411760" cy="255240"/>
+            <a:ext cx="8411040" cy="254520"/>
           </a:xfrm>
           <a:prstGeom prst="rect">
             <a:avLst/>
@@ -7973,7 +7946,7 @@
         <p:spPr>
           <a:xfrm>
             <a:off x="365760" y="1143000"/>
-            <a:ext cx="8411760" cy="1188000"/>
+            <a:ext cx="8411040" cy="1187280"/>
           </a:xfrm>
           <a:prstGeom prst="rect">
             <a:avLst/>
@@ -8022,7 +7995,7 @@
         <p:spPr>
           <a:xfrm>
             <a:off x="365760" y="1143000"/>
-            <a:ext cx="54000" cy="1188000"/>
+            <a:ext cx="53280" cy="1187280"/>
           </a:xfrm>
           <a:prstGeom prst="rect">
             <a:avLst/>
@@ -8071,7 +8044,7 @@
         <p:spPr>
           <a:xfrm>
             <a:off x="567000" y="1252800"/>
-            <a:ext cx="310320" cy="310320"/>
+            <a:ext cx="309600" cy="309600"/>
           </a:xfrm>
           <a:solidFill>
             <a:srgbClr val="dc2626"/>
@@ -8117,7 +8090,7 @@
         <p:spPr>
           <a:xfrm>
             <a:off x="567000" y="1252800"/>
-            <a:ext cx="310320" cy="310320"/>
+            <a:ext cx="309600" cy="309600"/>
           </a:xfrm>
           <a:prstGeom prst="rect">
             <a:avLst/>
@@ -8174,7 +8147,7 @@
         <p:spPr>
           <a:xfrm>
             <a:off x="1005840" y="1234440"/>
-            <a:ext cx="7405920" cy="273600"/>
+            <a:ext cx="7405200" cy="272880"/>
           </a:xfrm>
           <a:prstGeom prst="rect">
             <a:avLst/>
@@ -8231,7 +8204,7 @@
         <p:spPr>
           <a:xfrm>
             <a:off x="567000" y="1563480"/>
-            <a:ext cx="8027640" cy="328320"/>
+            <a:ext cx="8026920" cy="327600"/>
           </a:xfrm>
           <a:prstGeom prst="rect">
             <a:avLst/>
@@ -8280,7 +8253,7 @@
         <p:spPr>
           <a:xfrm>
             <a:off x="685800" y="1563480"/>
-            <a:ext cx="7817400" cy="328320"/>
+            <a:ext cx="7816680" cy="327600"/>
           </a:xfrm>
           <a:prstGeom prst="rect">
             <a:avLst/>
@@ -8337,7 +8310,7 @@
         <p:spPr>
           <a:xfrm>
             <a:off x="567000" y="1965960"/>
-            <a:ext cx="8027640" cy="273600"/>
+            <a:ext cx="8026920" cy="272880"/>
           </a:xfrm>
           <a:prstGeom prst="rect">
             <a:avLst/>
@@ -8404,7 +8377,7 @@
         <p:spPr>
           <a:xfrm>
             <a:off x="365760" y="2441520"/>
-            <a:ext cx="8411760" cy="1188000"/>
+            <a:ext cx="8411040" cy="1187280"/>
           </a:xfrm>
           <a:prstGeom prst="rect">
             <a:avLst/>
@@ -8453,7 +8426,7 @@
         <p:spPr>
           <a:xfrm>
             <a:off x="365760" y="2441520"/>
-            <a:ext cx="54000" cy="1188000"/>
+            <a:ext cx="53280" cy="1187280"/>
           </a:xfrm>
           <a:prstGeom prst="rect">
             <a:avLst/>
@@ -8502,7 +8475,7 @@
         <p:spPr>
           <a:xfrm>
             <a:off x="567000" y="2551320"/>
-            <a:ext cx="310320" cy="310320"/>
+            <a:ext cx="309600" cy="309600"/>
           </a:xfrm>
           <a:solidFill>
             <a:srgbClr val="d97706"/>
@@ -8548,7 +8521,7 @@
         <p:spPr>
           <a:xfrm>
             <a:off x="567000" y="2551320"/>
-            <a:ext cx="310320" cy="310320"/>
+            <a:ext cx="309600" cy="309600"/>
           </a:xfrm>
           <a:prstGeom prst="rect">
             <a:avLst/>
@@ -8605,7 +8578,7 @@
         <p:spPr>
           <a:xfrm>
             <a:off x="1005840" y="2532960"/>
-            <a:ext cx="7405920" cy="273600"/>
+            <a:ext cx="7405200" cy="272880"/>
           </a:xfrm>
           <a:prstGeom prst="rect">
             <a:avLst/>
@@ -8662,7 +8635,7 @@
         <p:spPr>
           <a:xfrm>
             <a:off x="567000" y="2862000"/>
-            <a:ext cx="8027640" cy="328320"/>
+            <a:ext cx="8026920" cy="327600"/>
           </a:xfrm>
           <a:prstGeom prst="rect">
             <a:avLst/>
@@ -8711,7 +8684,7 @@
         <p:spPr>
           <a:xfrm>
             <a:off x="685800" y="2862000"/>
-            <a:ext cx="7817400" cy="328320"/>
+            <a:ext cx="7816680" cy="327600"/>
           </a:xfrm>
           <a:prstGeom prst="rect">
             <a:avLst/>
@@ -8768,7 +8741,7 @@
         <p:spPr>
           <a:xfrm>
             <a:off x="567000" y="3264480"/>
-            <a:ext cx="8027640" cy="273600"/>
+            <a:ext cx="8026920" cy="272880"/>
           </a:xfrm>
           <a:prstGeom prst="rect">
             <a:avLst/>
@@ -8835,7 +8808,7 @@
         <p:spPr>
           <a:xfrm>
             <a:off x="365760" y="3740040"/>
-            <a:ext cx="8411760" cy="1188000"/>
+            <a:ext cx="8411040" cy="1187280"/>
           </a:xfrm>
           <a:prstGeom prst="rect">
             <a:avLst/>
@@ -8884,7 +8857,7 @@
         <p:spPr>
           <a:xfrm>
             <a:off x="365760" y="3740040"/>
-            <a:ext cx="54000" cy="1188000"/>
+            <a:ext cx="53280" cy="1187280"/>
           </a:xfrm>
           <a:prstGeom prst="rect">
             <a:avLst/>
@@ -8933,7 +8906,7 @@
         <p:spPr>
           <a:xfrm>
             <a:off x="567000" y="3849480"/>
-            <a:ext cx="310320" cy="310320"/>
+            <a:ext cx="309600" cy="309600"/>
           </a:xfrm>
           <a:solidFill>
             <a:srgbClr val="dc2626"/>
@@ -8979,7 +8952,7 @@
         <p:spPr>
           <a:xfrm>
             <a:off x="567000" y="3849480"/>
-            <a:ext cx="310320" cy="310320"/>
+            <a:ext cx="309600" cy="309600"/>
           </a:xfrm>
           <a:prstGeom prst="rect">
             <a:avLst/>
@@ -9036,7 +9009,7 @@
         <p:spPr>
           <a:xfrm>
             <a:off x="1005840" y="3831480"/>
-            <a:ext cx="7405920" cy="273600"/>
+            <a:ext cx="7405200" cy="272880"/>
           </a:xfrm>
           <a:prstGeom prst="rect">
             <a:avLst/>
@@ -9093,7 +9066,7 @@
         <p:spPr>
           <a:xfrm>
             <a:off x="567000" y="4160520"/>
-            <a:ext cx="8027640" cy="328320"/>
+            <a:ext cx="8026920" cy="327600"/>
           </a:xfrm>
           <a:prstGeom prst="rect">
             <a:avLst/>
@@ -9142,7 +9115,7 @@
         <p:spPr>
           <a:xfrm>
             <a:off x="685800" y="4160520"/>
-            <a:ext cx="7817400" cy="328320"/>
+            <a:ext cx="7816680" cy="327600"/>
           </a:xfrm>
           <a:prstGeom prst="rect">
             <a:avLst/>
@@ -9199,7 +9172,7 @@
         <p:spPr>
           <a:xfrm>
             <a:off x="567000" y="4563000"/>
-            <a:ext cx="8027640" cy="273600"/>
+            <a:ext cx="8026920" cy="272880"/>
           </a:xfrm>
           <a:prstGeom prst="rect">
             <a:avLst/>
@@ -9266,7 +9239,7 @@
         <p:spPr>
           <a:xfrm>
             <a:off x="0" y="4937760"/>
-            <a:ext cx="9143280" cy="205200"/>
+            <a:ext cx="9142560" cy="204480"/>
           </a:xfrm>
           <a:prstGeom prst="rect">
             <a:avLst/>
@@ -9315,7 +9288,7 @@
         <p:spPr>
           <a:xfrm>
             <a:off x="365760" y="4937760"/>
-            <a:ext cx="8411760" cy="205200"/>
+            <a:ext cx="8411040" cy="204480"/>
           </a:xfrm>
           <a:prstGeom prst="rect">
             <a:avLst/>
@@ -9409,7 +9382,7 @@
         <p:spPr>
           <a:xfrm>
             <a:off x="0" y="0"/>
-            <a:ext cx="9143280" cy="657720"/>
+            <a:ext cx="9142560" cy="657000"/>
           </a:xfrm>
           <a:prstGeom prst="rect">
             <a:avLst/>
@@ -9458,7 +9431,7 @@
         <p:spPr>
           <a:xfrm>
             <a:off x="274320" y="91440"/>
-            <a:ext cx="410760" cy="474840"/>
+            <a:ext cx="410040" cy="474120"/>
           </a:xfrm>
           <a:prstGeom prst="rect">
             <a:avLst/>
@@ -9515,7 +9488,7 @@
         <p:spPr>
           <a:xfrm>
             <a:off x="804600" y="64080"/>
-            <a:ext cx="8046000" cy="346680"/>
+            <a:ext cx="8045280" cy="345960"/>
           </a:xfrm>
           <a:prstGeom prst="rect">
             <a:avLst/>
@@ -9572,7 +9545,7 @@
         <p:spPr>
           <a:xfrm>
             <a:off x="804600" y="402480"/>
-            <a:ext cx="8046000" cy="227880"/>
+            <a:ext cx="8045280" cy="227160"/>
           </a:xfrm>
           <a:prstGeom prst="rect">
             <a:avLst/>
@@ -9629,7 +9602,7 @@
         <p:spPr>
           <a:xfrm>
             <a:off x="365760" y="786240"/>
-            <a:ext cx="5119920" cy="712440"/>
+            <a:ext cx="5119200" cy="711720"/>
           </a:xfrm>
           <a:prstGeom prst="rect">
             <a:avLst/>
@@ -9678,7 +9651,7 @@
         <p:spPr>
           <a:xfrm>
             <a:off x="365760" y="786240"/>
-            <a:ext cx="49680" cy="712440"/>
+            <a:ext cx="48960" cy="711720"/>
           </a:xfrm>
           <a:prstGeom prst="rect">
             <a:avLst/>
@@ -9727,7 +9700,7 @@
         <p:spPr>
           <a:xfrm>
             <a:off x="567000" y="987480"/>
-            <a:ext cx="310320" cy="310320"/>
+            <a:ext cx="309600" cy="309600"/>
           </a:xfrm>
           <a:solidFill>
             <a:srgbClr val="6b7280"/>
@@ -9773,7 +9746,7 @@
         <p:spPr>
           <a:xfrm>
             <a:off x="567000" y="987480"/>
-            <a:ext cx="310320" cy="310320"/>
+            <a:ext cx="309600" cy="309600"/>
           </a:xfrm>
           <a:prstGeom prst="rect">
             <a:avLst/>
@@ -9830,7 +9803,7 @@
         <p:spPr>
           <a:xfrm>
             <a:off x="1005840" y="877680"/>
-            <a:ext cx="4342680" cy="236880"/>
+            <a:ext cx="4341960" cy="236160"/>
           </a:xfrm>
           <a:prstGeom prst="rect">
             <a:avLst/>
@@ -9887,7 +9860,7 @@
         <p:spPr>
           <a:xfrm>
             <a:off x="1005840" y="1170360"/>
-            <a:ext cx="4342680" cy="273600"/>
+            <a:ext cx="4341960" cy="272880"/>
           </a:xfrm>
           <a:prstGeom prst="rect">
             <a:avLst/>
@@ -9944,7 +9917,7 @@
         <p:spPr>
           <a:xfrm>
             <a:off x="365760" y="1609200"/>
-            <a:ext cx="5119920" cy="712440"/>
+            <a:ext cx="5119200" cy="711720"/>
           </a:xfrm>
           <a:prstGeom prst="rect">
             <a:avLst/>
@@ -9993,7 +9966,7 @@
         <p:spPr>
           <a:xfrm>
             <a:off x="365760" y="1609200"/>
-            <a:ext cx="49680" cy="712440"/>
+            <a:ext cx="48960" cy="711720"/>
           </a:xfrm>
           <a:prstGeom prst="rect">
             <a:avLst/>
@@ -10042,7 +10015,7 @@
         <p:spPr>
           <a:xfrm>
             <a:off x="567000" y="1810440"/>
-            <a:ext cx="310320" cy="310320"/>
+            <a:ext cx="309600" cy="309600"/>
           </a:xfrm>
           <a:solidFill>
             <a:srgbClr val="1a56db"/>
@@ -10088,7 +10061,7 @@
         <p:spPr>
           <a:xfrm>
             <a:off x="567000" y="1810440"/>
-            <a:ext cx="310320" cy="310320"/>
+            <a:ext cx="309600" cy="309600"/>
           </a:xfrm>
           <a:prstGeom prst="rect">
             <a:avLst/>
@@ -10145,7 +10118,7 @@
         <p:spPr>
           <a:xfrm>
             <a:off x="1005840" y="1700640"/>
-            <a:ext cx="4342680" cy="236880"/>
+            <a:ext cx="4341960" cy="236160"/>
           </a:xfrm>
           <a:prstGeom prst="rect">
             <a:avLst/>
@@ -10202,7 +10175,7 @@
         <p:spPr>
           <a:xfrm>
             <a:off x="1005840" y="1993320"/>
-            <a:ext cx="4342680" cy="273600"/>
+            <a:ext cx="4341960" cy="272880"/>
           </a:xfrm>
           <a:prstGeom prst="rect">
             <a:avLst/>
@@ -10259,7 +10232,7 @@
         <p:spPr>
           <a:xfrm>
             <a:off x="365760" y="2432160"/>
-            <a:ext cx="5119920" cy="712440"/>
+            <a:ext cx="5119200" cy="711720"/>
           </a:xfrm>
           <a:prstGeom prst="rect">
             <a:avLst/>
@@ -10308,7 +10281,7 @@
         <p:spPr>
           <a:xfrm>
             <a:off x="365760" y="2432160"/>
-            <a:ext cx="49680" cy="712440"/>
+            <a:ext cx="48960" cy="711720"/>
           </a:xfrm>
           <a:prstGeom prst="rect">
             <a:avLst/>
@@ -10357,7 +10330,7 @@
         <p:spPr>
           <a:xfrm>
             <a:off x="567000" y="2633400"/>
-            <a:ext cx="310320" cy="310320"/>
+            <a:ext cx="309600" cy="309600"/>
           </a:xfrm>
           <a:solidFill>
             <a:srgbClr val="3b82f6"/>
@@ -10403,7 +10376,7 @@
         <p:spPr>
           <a:xfrm>
             <a:off x="567000" y="2633400"/>
-            <a:ext cx="310320" cy="310320"/>
+            <a:ext cx="309600" cy="309600"/>
           </a:xfrm>
           <a:prstGeom prst="rect">
             <a:avLst/>
@@ -10460,7 +10433,7 @@
         <p:spPr>
           <a:xfrm>
             <a:off x="1005840" y="2523600"/>
-            <a:ext cx="4342680" cy="236880"/>
+            <a:ext cx="4341960" cy="236160"/>
           </a:xfrm>
           <a:prstGeom prst="rect">
             <a:avLst/>
@@ -10517,7 +10490,7 @@
         <p:spPr>
           <a:xfrm>
             <a:off x="1005840" y="2816280"/>
-            <a:ext cx="4342680" cy="273600"/>
+            <a:ext cx="4341960" cy="272880"/>
           </a:xfrm>
           <a:prstGeom prst="rect">
             <a:avLst/>
@@ -10574,7 +10547,7 @@
         <p:spPr>
           <a:xfrm>
             <a:off x="365760" y="3255120"/>
-            <a:ext cx="5119920" cy="712440"/>
+            <a:ext cx="5119200" cy="711720"/>
           </a:xfrm>
           <a:prstGeom prst="rect">
             <a:avLst/>
@@ -10623,7 +10596,7 @@
         <p:spPr>
           <a:xfrm>
             <a:off x="365760" y="3255120"/>
-            <a:ext cx="49680" cy="712440"/>
+            <a:ext cx="48960" cy="711720"/>
           </a:xfrm>
           <a:prstGeom prst="rect">
             <a:avLst/>
@@ -10672,7 +10645,7 @@
         <p:spPr>
           <a:xfrm>
             <a:off x="567000" y="3456360"/>
-            <a:ext cx="310320" cy="310320"/>
+            <a:ext cx="309600" cy="309600"/>
           </a:xfrm>
           <a:solidFill>
             <a:srgbClr val="dc2626"/>
@@ -10718,7 +10691,7 @@
         <p:spPr>
           <a:xfrm>
             <a:off x="567000" y="3456360"/>
-            <a:ext cx="310320" cy="310320"/>
+            <a:ext cx="309600" cy="309600"/>
           </a:xfrm>
           <a:prstGeom prst="rect">
             <a:avLst/>
@@ -10775,7 +10748,7 @@
         <p:spPr>
           <a:xfrm>
             <a:off x="1005840" y="3346560"/>
-            <a:ext cx="4342680" cy="236880"/>
+            <a:ext cx="4341960" cy="236160"/>
           </a:xfrm>
           <a:prstGeom prst="rect">
             <a:avLst/>
@@ -10832,7 +10805,7 @@
         <p:spPr>
           <a:xfrm>
             <a:off x="1005840" y="3639240"/>
-            <a:ext cx="4342680" cy="273600"/>
+            <a:ext cx="4341960" cy="272880"/>
           </a:xfrm>
           <a:prstGeom prst="rect">
             <a:avLst/>
@@ -10889,7 +10862,7 @@
         <p:spPr>
           <a:xfrm>
             <a:off x="365760" y="4078080"/>
-            <a:ext cx="5119920" cy="712440"/>
+            <a:ext cx="5119200" cy="711720"/>
           </a:xfrm>
           <a:prstGeom prst="rect">
             <a:avLst/>
@@ -10938,7 +10911,7 @@
         <p:spPr>
           <a:xfrm>
             <a:off x="365760" y="4078080"/>
-            <a:ext cx="49680" cy="712440"/>
+            <a:ext cx="48960" cy="711720"/>
           </a:xfrm>
           <a:prstGeom prst="rect">
             <a:avLst/>
@@ -10987,7 +10960,7 @@
         <p:spPr>
           <a:xfrm>
             <a:off x="567000" y="4279320"/>
-            <a:ext cx="310320" cy="310320"/>
+            <a:ext cx="309600" cy="309600"/>
           </a:xfrm>
           <a:solidFill>
             <a:srgbClr val="16a34a"/>
@@ -11033,7 +11006,7 @@
         <p:spPr>
           <a:xfrm>
             <a:off x="567000" y="4279320"/>
-            <a:ext cx="310320" cy="310320"/>
+            <a:ext cx="309600" cy="309600"/>
           </a:xfrm>
           <a:prstGeom prst="rect">
             <a:avLst/>
@@ -11090,7 +11063,7 @@
         <p:spPr>
           <a:xfrm>
             <a:off x="1005840" y="4169520"/>
-            <a:ext cx="4342680" cy="236880"/>
+            <a:ext cx="4341960" cy="236160"/>
           </a:xfrm>
           <a:prstGeom prst="rect">
             <a:avLst/>
@@ -11147,7 +11120,7 @@
         <p:spPr>
           <a:xfrm>
             <a:off x="1005840" y="4462200"/>
-            <a:ext cx="4342680" cy="273600"/>
+            <a:ext cx="4341960" cy="272880"/>
           </a:xfrm>
           <a:prstGeom prst="rect">
             <a:avLst/>
@@ -11204,7 +11177,7 @@
         <p:spPr>
           <a:xfrm>
             <a:off x="5580000" y="786240"/>
-            <a:ext cx="3474000" cy="3173760"/>
+            <a:ext cx="3473280" cy="3173040"/>
           </a:xfrm>
           <a:prstGeom prst="rect">
             <a:avLst/>
@@ -11253,7 +11226,7 @@
         <p:spPr>
           <a:xfrm>
             <a:off x="5580000" y="786240"/>
-            <a:ext cx="3474000" cy="383400"/>
+            <a:ext cx="3473280" cy="382680"/>
           </a:xfrm>
           <a:prstGeom prst="rect">
             <a:avLst/>
@@ -11302,7 +11275,7 @@
         <p:spPr>
           <a:xfrm>
             <a:off x="5671440" y="786240"/>
-            <a:ext cx="3291120" cy="383400"/>
+            <a:ext cx="3290400" cy="382680"/>
           </a:xfrm>
           <a:prstGeom prst="rect">
             <a:avLst/>
@@ -11359,7 +11332,7 @@
         <p:spPr>
           <a:xfrm>
             <a:off x="5580000" y="1243440"/>
-            <a:ext cx="3474000" cy="474840"/>
+            <a:ext cx="3473280" cy="474120"/>
           </a:xfrm>
           <a:prstGeom prst="rect">
             <a:avLst/>
@@ -11408,7 +11381,7 @@
         <p:spPr>
           <a:xfrm>
             <a:off x="5689800" y="1243440"/>
-            <a:ext cx="1736640" cy="474840"/>
+            <a:ext cx="1735920" cy="474120"/>
           </a:xfrm>
           <a:prstGeom prst="rect">
             <a:avLst/>
@@ -11465,7 +11438,7 @@
         <p:spPr>
           <a:xfrm>
             <a:off x="7454520" y="1243440"/>
-            <a:ext cx="1508040" cy="474840"/>
+            <a:ext cx="1507320" cy="474120"/>
           </a:xfrm>
           <a:prstGeom prst="rect">
             <a:avLst/>
@@ -11522,7 +11495,7 @@
         <p:spPr>
           <a:xfrm>
             <a:off x="5580000" y="1774080"/>
-            <a:ext cx="3474000" cy="474840"/>
+            <a:ext cx="3473280" cy="474120"/>
           </a:xfrm>
           <a:prstGeom prst="rect">
             <a:avLst/>
@@ -11571,7 +11544,7 @@
         <p:spPr>
           <a:xfrm>
             <a:off x="5689800" y="1774080"/>
-            <a:ext cx="1736640" cy="474840"/>
+            <a:ext cx="1735920" cy="474120"/>
           </a:xfrm>
           <a:prstGeom prst="rect">
             <a:avLst/>
@@ -11628,7 +11601,7 @@
         <p:spPr>
           <a:xfrm>
             <a:off x="7454520" y="1774080"/>
-            <a:ext cx="1508040" cy="474840"/>
+            <a:ext cx="1507320" cy="474120"/>
           </a:xfrm>
           <a:prstGeom prst="rect">
             <a:avLst/>
@@ -11695,7 +11668,7 @@
         <p:spPr>
           <a:xfrm>
             <a:off x="5580000" y="2304360"/>
-            <a:ext cx="3474000" cy="474840"/>
+            <a:ext cx="3473280" cy="474120"/>
           </a:xfrm>
           <a:prstGeom prst="rect">
             <a:avLst/>
@@ -11744,7 +11717,7 @@
         <p:spPr>
           <a:xfrm>
             <a:off x="5689800" y="2304360"/>
-            <a:ext cx="1736640" cy="474840"/>
+            <a:ext cx="1735920" cy="474120"/>
           </a:xfrm>
           <a:prstGeom prst="rect">
             <a:avLst/>
@@ -11801,7 +11774,7 @@
         <p:spPr>
           <a:xfrm>
             <a:off x="7454520" y="2304360"/>
-            <a:ext cx="1508040" cy="474840"/>
+            <a:ext cx="1507320" cy="474120"/>
           </a:xfrm>
           <a:prstGeom prst="rect">
             <a:avLst/>
@@ -11858,7 +11831,7 @@
         <p:spPr>
           <a:xfrm>
             <a:off x="5580000" y="2834640"/>
-            <a:ext cx="3474000" cy="474840"/>
+            <a:ext cx="3473280" cy="474120"/>
           </a:xfrm>
           <a:prstGeom prst="rect">
             <a:avLst/>
@@ -11907,7 +11880,7 @@
         <p:spPr>
           <a:xfrm>
             <a:off x="5689800" y="2834640"/>
-            <a:ext cx="1736640" cy="474840"/>
+            <a:ext cx="1735920" cy="474120"/>
           </a:xfrm>
           <a:prstGeom prst="rect">
             <a:avLst/>
@@ -11964,7 +11937,7 @@
         <p:spPr>
           <a:xfrm>
             <a:off x="7454520" y="2834640"/>
-            <a:ext cx="1508040" cy="474840"/>
+            <a:ext cx="1507320" cy="474120"/>
           </a:xfrm>
           <a:prstGeom prst="rect">
             <a:avLst/>
@@ -12021,7 +11994,7 @@
         <p:spPr>
           <a:xfrm>
             <a:off x="5580000" y="3364920"/>
-            <a:ext cx="3474000" cy="474840"/>
+            <a:ext cx="3473280" cy="474120"/>
           </a:xfrm>
           <a:prstGeom prst="rect">
             <a:avLst/>
@@ -12070,7 +12043,7 @@
         <p:spPr>
           <a:xfrm>
             <a:off x="5689800" y="3364920"/>
-            <a:ext cx="1736640" cy="474840"/>
+            <a:ext cx="1735920" cy="474120"/>
           </a:xfrm>
           <a:prstGeom prst="rect">
             <a:avLst/>
@@ -12127,7 +12100,7 @@
         <p:spPr>
           <a:xfrm>
             <a:off x="7454520" y="3364920"/>
-            <a:ext cx="1508040" cy="474840"/>
+            <a:ext cx="1507320" cy="474120"/>
           </a:xfrm>
           <a:prstGeom prst="rect">
             <a:avLst/>
@@ -12184,7 +12157,7 @@
         <p:spPr>
           <a:xfrm>
             <a:off x="360000" y="4900320"/>
-            <a:ext cx="8411760" cy="273600"/>
+            <a:ext cx="8411040" cy="272880"/>
           </a:xfrm>
           <a:prstGeom prst="rect">
             <a:avLst/>
@@ -12233,7 +12206,7 @@
         <p:spPr>
           <a:xfrm>
             <a:off x="502920" y="4901040"/>
-            <a:ext cx="8228880" cy="273600"/>
+            <a:ext cx="8228160" cy="272880"/>
           </a:xfrm>
           <a:prstGeom prst="rect">
             <a:avLst/>
@@ -12327,7 +12300,7 @@
         <p:spPr>
           <a:xfrm>
             <a:off x="0" y="0"/>
-            <a:ext cx="9143280" cy="657720"/>
+            <a:ext cx="9142560" cy="657000"/>
           </a:xfrm>
           <a:prstGeom prst="rect">
             <a:avLst/>
@@ -12376,7 +12349,7 @@
         <p:spPr>
           <a:xfrm>
             <a:off x="274320" y="91440"/>
-            <a:ext cx="410760" cy="474840"/>
+            <a:ext cx="410040" cy="474120"/>
           </a:xfrm>
           <a:prstGeom prst="rect">
             <a:avLst/>
@@ -12433,7 +12406,7 @@
         <p:spPr>
           <a:xfrm>
             <a:off x="804600" y="64080"/>
-            <a:ext cx="8046000" cy="346680"/>
+            <a:ext cx="8045280" cy="345960"/>
           </a:xfrm>
           <a:prstGeom prst="rect">
             <a:avLst/>
@@ -12490,7 +12463,7 @@
         <p:spPr>
           <a:xfrm>
             <a:off x="804600" y="402480"/>
-            <a:ext cx="8046000" cy="227880"/>
+            <a:ext cx="8045280" cy="227160"/>
           </a:xfrm>
           <a:prstGeom prst="rect">
             <a:avLst/>
@@ -12547,7 +12520,7 @@
         <p:spPr>
           <a:xfrm>
             <a:off x="365760" y="768240"/>
-            <a:ext cx="8411760" cy="236880"/>
+            <a:ext cx="8411040" cy="236160"/>
           </a:xfrm>
           <a:prstGeom prst="rect">
             <a:avLst/>
@@ -12604,7 +12577,7 @@
         <p:spPr>
           <a:xfrm>
             <a:off x="365760" y="1078920"/>
-            <a:ext cx="8411760" cy="1188000"/>
+            <a:ext cx="8411040" cy="1187280"/>
           </a:xfrm>
           <a:prstGeom prst="rect">
             <a:avLst/>
@@ -12653,7 +12626,7 @@
         <p:spPr>
           <a:xfrm>
             <a:off x="365760" y="1078920"/>
-            <a:ext cx="54000" cy="1188000"/>
+            <a:ext cx="53280" cy="1187280"/>
           </a:xfrm>
           <a:prstGeom prst="rect">
             <a:avLst/>
@@ -12702,7 +12675,7 @@
         <p:spPr>
           <a:xfrm>
             <a:off x="567000" y="1188720"/>
-            <a:ext cx="310320" cy="310320"/>
+            <a:ext cx="309600" cy="309600"/>
           </a:xfrm>
           <a:solidFill>
             <a:srgbClr val="1a56db"/>
@@ -12748,7 +12721,7 @@
         <p:spPr>
           <a:xfrm>
             <a:off x="567000" y="1188720"/>
-            <a:ext cx="310320" cy="310320"/>
+            <a:ext cx="309600" cy="309600"/>
           </a:xfrm>
           <a:prstGeom prst="rect">
             <a:avLst/>
@@ -12805,7 +12778,7 @@
         <p:spPr>
           <a:xfrm>
             <a:off x="1005840" y="1170360"/>
-            <a:ext cx="7405920" cy="273600"/>
+            <a:ext cx="7405200" cy="272880"/>
           </a:xfrm>
           <a:prstGeom prst="rect">
             <a:avLst/>
@@ -12862,7 +12835,7 @@
         <p:spPr>
           <a:xfrm>
             <a:off x="567000" y="1499760"/>
-            <a:ext cx="8027640" cy="328320"/>
+            <a:ext cx="8026920" cy="327600"/>
           </a:xfrm>
           <a:prstGeom prst="rect">
             <a:avLst/>
@@ -12911,7 +12884,7 @@
         <p:spPr>
           <a:xfrm>
             <a:off x="685800" y="1499760"/>
-            <a:ext cx="7817400" cy="328320"/>
+            <a:ext cx="7816680" cy="327600"/>
           </a:xfrm>
           <a:prstGeom prst="rect">
             <a:avLst/>
@@ -12968,7 +12941,7 @@
         <p:spPr>
           <a:xfrm>
             <a:off x="567000" y="1901880"/>
-            <a:ext cx="8027640" cy="273600"/>
+            <a:ext cx="8026920" cy="272880"/>
           </a:xfrm>
           <a:prstGeom prst="rect">
             <a:avLst/>
@@ -13025,7 +12998,7 @@
         <p:spPr>
           <a:xfrm>
             <a:off x="365760" y="2377440"/>
-            <a:ext cx="8411760" cy="1188000"/>
+            <a:ext cx="8411040" cy="1187280"/>
           </a:xfrm>
           <a:prstGeom prst="rect">
             <a:avLst/>
@@ -13074,7 +13047,7 @@
         <p:spPr>
           <a:xfrm>
             <a:off x="365760" y="2377440"/>
-            <a:ext cx="54000" cy="1188000"/>
+            <a:ext cx="53280" cy="1187280"/>
           </a:xfrm>
           <a:prstGeom prst="rect">
             <a:avLst/>
@@ -13123,7 +13096,7 @@
         <p:spPr>
           <a:xfrm>
             <a:off x="567000" y="2487240"/>
-            <a:ext cx="310320" cy="310320"/>
+            <a:ext cx="309600" cy="309600"/>
           </a:xfrm>
           <a:solidFill>
             <a:srgbClr val="3b82f6"/>
@@ -13169,7 +13142,7 @@
         <p:spPr>
           <a:xfrm>
             <a:off x="567000" y="2487240"/>
-            <a:ext cx="310320" cy="310320"/>
+            <a:ext cx="309600" cy="309600"/>
           </a:xfrm>
           <a:prstGeom prst="rect">
             <a:avLst/>
@@ -13226,7 +13199,7 @@
         <p:spPr>
           <a:xfrm>
             <a:off x="1005840" y="2468880"/>
-            <a:ext cx="7405920" cy="273600"/>
+            <a:ext cx="7405200" cy="272880"/>
           </a:xfrm>
           <a:prstGeom prst="rect">
             <a:avLst/>
@@ -13283,7 +13256,7 @@
         <p:spPr>
           <a:xfrm>
             <a:off x="567000" y="2797920"/>
-            <a:ext cx="8027640" cy="328320"/>
+            <a:ext cx="8026920" cy="327600"/>
           </a:xfrm>
           <a:prstGeom prst="rect">
             <a:avLst/>
@@ -13332,7 +13305,7 @@
         <p:spPr>
           <a:xfrm>
             <a:off x="685800" y="2797920"/>
-            <a:ext cx="7817400" cy="328320"/>
+            <a:ext cx="7816680" cy="327600"/>
           </a:xfrm>
           <a:prstGeom prst="rect">
             <a:avLst/>
@@ -13389,7 +13362,7 @@
         <p:spPr>
           <a:xfrm>
             <a:off x="567000" y="3200400"/>
-            <a:ext cx="8027640" cy="273600"/>
+            <a:ext cx="8026920" cy="272880"/>
           </a:xfrm>
           <a:prstGeom prst="rect">
             <a:avLst/>
@@ -13446,7 +13419,7 @@
         <p:spPr>
           <a:xfrm>
             <a:off x="365760" y="3675960"/>
-            <a:ext cx="8411760" cy="1188000"/>
+            <a:ext cx="8411040" cy="1187280"/>
           </a:xfrm>
           <a:prstGeom prst="rect">
             <a:avLst/>
@@ -13495,7 +13468,7 @@
         <p:spPr>
           <a:xfrm>
             <a:off x="365760" y="3675960"/>
-            <a:ext cx="54000" cy="1188000"/>
+            <a:ext cx="53280" cy="1187280"/>
           </a:xfrm>
           <a:prstGeom prst="rect">
             <a:avLst/>
@@ -13544,7 +13517,7 @@
         <p:spPr>
           <a:xfrm>
             <a:off x="567000" y="3785760"/>
-            <a:ext cx="310320" cy="310320"/>
+            <a:ext cx="309600" cy="309600"/>
           </a:xfrm>
           <a:solidFill>
             <a:srgbClr val="16a34a"/>
@@ -13590,7 +13563,7 @@
         <p:spPr>
           <a:xfrm>
             <a:off x="567000" y="3785760"/>
-            <a:ext cx="310320" cy="310320"/>
+            <a:ext cx="309600" cy="309600"/>
           </a:xfrm>
           <a:prstGeom prst="rect">
             <a:avLst/>
@@ -13647,7 +13620,7 @@
         <p:spPr>
           <a:xfrm>
             <a:off x="1005840" y="3767400"/>
-            <a:ext cx="7405920" cy="273600"/>
+            <a:ext cx="7405200" cy="272880"/>
           </a:xfrm>
           <a:prstGeom prst="rect">
             <a:avLst/>
@@ -13704,7 +13677,7 @@
         <p:spPr>
           <a:xfrm>
             <a:off x="567000" y="4096440"/>
-            <a:ext cx="8027640" cy="328320"/>
+            <a:ext cx="8026920" cy="327600"/>
           </a:xfrm>
           <a:prstGeom prst="rect">
             <a:avLst/>
@@ -13753,7 +13726,7 @@
         <p:spPr>
           <a:xfrm>
             <a:off x="685800" y="4096440"/>
-            <a:ext cx="7817400" cy="328320"/>
+            <a:ext cx="7816680" cy="327600"/>
           </a:xfrm>
           <a:prstGeom prst="rect">
             <a:avLst/>
@@ -13810,7 +13783,7 @@
         <p:spPr>
           <a:xfrm>
             <a:off x="567000" y="4498920"/>
-            <a:ext cx="8027640" cy="273600"/>
+            <a:ext cx="8026920" cy="272880"/>
           </a:xfrm>
           <a:prstGeom prst="rect">
             <a:avLst/>
@@ -13867,7 +13840,7 @@
         <p:spPr>
           <a:xfrm>
             <a:off x="0" y="4937760"/>
-            <a:ext cx="9143280" cy="205200"/>
+            <a:ext cx="9142560" cy="204480"/>
           </a:xfrm>
           <a:prstGeom prst="rect">
             <a:avLst/>
@@ -13916,7 +13889,7 @@
         <p:spPr>
           <a:xfrm>
             <a:off x="365760" y="4937760"/>
-            <a:ext cx="8411760" cy="205200"/>
+            <a:ext cx="8411040" cy="204480"/>
           </a:xfrm>
           <a:prstGeom prst="rect">
             <a:avLst/>
@@ -14010,7 +13983,7 @@
         <p:spPr>
           <a:xfrm>
             <a:off x="0" y="0"/>
-            <a:ext cx="9143280" cy="657720"/>
+            <a:ext cx="9142560" cy="657000"/>
           </a:xfrm>
           <a:prstGeom prst="rect">
             <a:avLst/>
@@ -14059,7 +14032,7 @@
         <p:spPr>
           <a:xfrm>
             <a:off x="274320" y="91440"/>
-            <a:ext cx="410760" cy="474840"/>
+            <a:ext cx="410040" cy="474120"/>
           </a:xfrm>
           <a:prstGeom prst="rect">
             <a:avLst/>
@@ -14116,7 +14089,7 @@
         <p:spPr>
           <a:xfrm>
             <a:off x="804600" y="64080"/>
-            <a:ext cx="8046000" cy="346680"/>
+            <a:ext cx="8045280" cy="345960"/>
           </a:xfrm>
           <a:prstGeom prst="rect">
             <a:avLst/>
@@ -14153,7 +14126,7 @@
                 <a:latin typeface="Calibri"/>
                 <a:ea typeface="Calibri"/>
               </a:rPr>
-              <a:t>Defensive Strategy — Live Demonstration</a:t>
+              <a:t>Defensive Strategy - Live Demonstration</a:t>
             </a:r>
             <a:endParaRPr b="0" lang="en-IN" sz="2000" spc="-1" strike="noStrike">
               <a:solidFill>
@@ -14173,7 +14146,7 @@
         <p:spPr>
           <a:xfrm>
             <a:off x="804600" y="402480"/>
-            <a:ext cx="8046000" cy="227880"/>
+            <a:ext cx="8045280" cy="227160"/>
           </a:xfrm>
           <a:prstGeom prst="rect">
             <a:avLst/>
@@ -14210,7 +14183,7 @@
                 <a:latin typeface="Calibri"/>
                 <a:ea typeface="Calibri"/>
               </a:rPr>
-              <a:t>Same attack script, same threads — pointed at the Hardened Host</a:t>
+              <a:t>Same attack script, same threads - pointed at the Hardened Host</a:t>
             </a:r>
             <a:endParaRPr b="0" lang="en-IN" sz="1050" spc="-1" strike="noStrike">
               <a:solidFill>
@@ -14230,7 +14203,7 @@
         <p:spPr>
           <a:xfrm>
             <a:off x="365760" y="786240"/>
-            <a:ext cx="5028480" cy="4132440"/>
+            <a:ext cx="5027760" cy="4131720"/>
           </a:xfrm>
           <a:prstGeom prst="rect">
             <a:avLst/>
@@ -14279,7 +14252,7 @@
         <p:spPr>
           <a:xfrm>
             <a:off x="365760" y="786240"/>
-            <a:ext cx="5028480" cy="383400"/>
+            <a:ext cx="5027760" cy="382680"/>
           </a:xfrm>
           <a:prstGeom prst="rect">
             <a:avLst/>
@@ -14330,7 +14303,7 @@
         <p:spPr>
           <a:xfrm>
             <a:off x="502920" y="786240"/>
-            <a:ext cx="4754160" cy="383400"/>
+            <a:ext cx="4753440" cy="382680"/>
           </a:xfrm>
           <a:prstGeom prst="rect">
             <a:avLst/>
@@ -14387,7 +14360,7 @@
         <p:spPr>
           <a:xfrm>
             <a:off x="502920" y="1261800"/>
-            <a:ext cx="4754160" cy="593640"/>
+            <a:ext cx="4753440" cy="592920"/>
           </a:xfrm>
           <a:prstGeom prst="rect">
             <a:avLst/>
@@ -14436,7 +14409,7 @@
         <p:spPr>
           <a:xfrm>
             <a:off x="502920" y="1261800"/>
-            <a:ext cx="49680" cy="593640"/>
+            <a:ext cx="48960" cy="592920"/>
           </a:xfrm>
           <a:prstGeom prst="rect">
             <a:avLst/>
@@ -14485,7 +14458,7 @@
         <p:spPr>
           <a:xfrm>
             <a:off x="685800" y="1316880"/>
-            <a:ext cx="4434120" cy="218880"/>
+            <a:ext cx="4433400" cy="218160"/>
           </a:xfrm>
           <a:prstGeom prst="rect">
             <a:avLst/>
@@ -14542,7 +14515,7 @@
         <p:spPr>
           <a:xfrm>
             <a:off x="685800" y="1554480"/>
-            <a:ext cx="4434120" cy="236880"/>
+            <a:ext cx="4433400" cy="236160"/>
           </a:xfrm>
           <a:prstGeom prst="rect">
             <a:avLst/>
@@ -14599,7 +14572,7 @@
         <p:spPr>
           <a:xfrm>
             <a:off x="502920" y="1947600"/>
-            <a:ext cx="4754160" cy="593640"/>
+            <a:ext cx="4753440" cy="592920"/>
           </a:xfrm>
           <a:prstGeom prst="rect">
             <a:avLst/>
@@ -14648,7 +14621,7 @@
         <p:spPr>
           <a:xfrm>
             <a:off x="502920" y="1947600"/>
-            <a:ext cx="49680" cy="593640"/>
+            <a:ext cx="48960" cy="592920"/>
           </a:xfrm>
           <a:prstGeom prst="rect">
             <a:avLst/>
@@ -14697,7 +14670,7 @@
         <p:spPr>
           <a:xfrm>
             <a:off x="685800" y="2002680"/>
-            <a:ext cx="4434120" cy="218880"/>
+            <a:ext cx="4433400" cy="218160"/>
           </a:xfrm>
           <a:prstGeom prst="rect">
             <a:avLst/>
@@ -14754,7 +14727,7 @@
         <p:spPr>
           <a:xfrm>
             <a:off x="685800" y="2240280"/>
-            <a:ext cx="4434120" cy="236880"/>
+            <a:ext cx="4433400" cy="236160"/>
           </a:xfrm>
           <a:prstGeom prst="rect">
             <a:avLst/>
@@ -14811,7 +14784,7 @@
         <p:spPr>
           <a:xfrm>
             <a:off x="502920" y="2633400"/>
-            <a:ext cx="4754160" cy="593640"/>
+            <a:ext cx="4753440" cy="592920"/>
           </a:xfrm>
           <a:prstGeom prst="rect">
             <a:avLst/>
@@ -14860,7 +14833,7 @@
         <p:spPr>
           <a:xfrm>
             <a:off x="502920" y="2633400"/>
-            <a:ext cx="49680" cy="593640"/>
+            <a:ext cx="48960" cy="592920"/>
           </a:xfrm>
           <a:prstGeom prst="rect">
             <a:avLst/>
@@ -14909,7 +14882,7 @@
         <p:spPr>
           <a:xfrm>
             <a:off x="685800" y="2688480"/>
-            <a:ext cx="4434120" cy="218880"/>
+            <a:ext cx="4433400" cy="218160"/>
           </a:xfrm>
           <a:prstGeom prst="rect">
             <a:avLst/>
@@ -14966,7 +14939,7 @@
         <p:spPr>
           <a:xfrm>
             <a:off x="685800" y="2926080"/>
-            <a:ext cx="4434120" cy="236880"/>
+            <a:ext cx="4433400" cy="236160"/>
           </a:xfrm>
           <a:prstGeom prst="rect">
             <a:avLst/>
@@ -15023,7 +14996,7 @@
         <p:spPr>
           <a:xfrm>
             <a:off x="502920" y="3319200"/>
-            <a:ext cx="4754160" cy="593640"/>
+            <a:ext cx="4753440" cy="592920"/>
           </a:xfrm>
           <a:prstGeom prst="rect">
             <a:avLst/>
@@ -15072,7 +15045,7 @@
         <p:spPr>
           <a:xfrm>
             <a:off x="502920" y="3319200"/>
-            <a:ext cx="49680" cy="593640"/>
+            <a:ext cx="48960" cy="592920"/>
           </a:xfrm>
           <a:prstGeom prst="rect">
             <a:avLst/>
@@ -15121,7 +15094,7 @@
         <p:spPr>
           <a:xfrm>
             <a:off x="685800" y="3374280"/>
-            <a:ext cx="4434120" cy="218880"/>
+            <a:ext cx="4433400" cy="218160"/>
           </a:xfrm>
           <a:prstGeom prst="rect">
             <a:avLst/>
@@ -15178,7 +15151,7 @@
         <p:spPr>
           <a:xfrm>
             <a:off x="685800" y="3611880"/>
-            <a:ext cx="4434120" cy="236880"/>
+            <a:ext cx="4433400" cy="236160"/>
           </a:xfrm>
           <a:prstGeom prst="rect">
             <a:avLst/>
@@ -15235,7 +15208,7 @@
         <p:spPr>
           <a:xfrm>
             <a:off x="502920" y="4005000"/>
-            <a:ext cx="4754160" cy="593640"/>
+            <a:ext cx="4753440" cy="592920"/>
           </a:xfrm>
           <a:prstGeom prst="rect">
             <a:avLst/>
@@ -15284,7 +15257,7 @@
         <p:spPr>
           <a:xfrm>
             <a:off x="502920" y="4005000"/>
-            <a:ext cx="49680" cy="593640"/>
+            <a:ext cx="48960" cy="592920"/>
           </a:xfrm>
           <a:prstGeom prst="rect">
             <a:avLst/>
@@ -15333,7 +15306,7 @@
         <p:spPr>
           <a:xfrm>
             <a:off x="685800" y="4060080"/>
-            <a:ext cx="4434120" cy="218880"/>
+            <a:ext cx="4433400" cy="218160"/>
           </a:xfrm>
           <a:prstGeom prst="rect">
             <a:avLst/>
@@ -15390,7 +15363,7 @@
         <p:spPr>
           <a:xfrm>
             <a:off x="685800" y="4297680"/>
-            <a:ext cx="4434120" cy="236880"/>
+            <a:ext cx="4433400" cy="236160"/>
           </a:xfrm>
           <a:prstGeom prst="rect">
             <a:avLst/>
@@ -15447,7 +15420,7 @@
         <p:spPr>
           <a:xfrm>
             <a:off x="5577840" y="786240"/>
-            <a:ext cx="3199680" cy="4132440"/>
+            <a:ext cx="3198960" cy="4131720"/>
           </a:xfrm>
           <a:prstGeom prst="rect">
             <a:avLst/>
@@ -15496,7 +15469,7 @@
         <p:spPr>
           <a:xfrm>
             <a:off x="5577840" y="786240"/>
-            <a:ext cx="3199680" cy="383400"/>
+            <a:ext cx="3198960" cy="382680"/>
           </a:xfrm>
           <a:prstGeom prst="rect">
             <a:avLst/>
@@ -15545,7 +15518,7 @@
         <p:spPr>
           <a:xfrm>
             <a:off x="5669280" y="786240"/>
-            <a:ext cx="3016800" cy="383400"/>
+            <a:ext cx="3016080" cy="382680"/>
           </a:xfrm>
           <a:prstGeom prst="rect">
             <a:avLst/>
@@ -15602,7 +15575,7 @@
         <p:spPr>
           <a:xfrm>
             <a:off x="5577840" y="1225440"/>
-            <a:ext cx="3199680" cy="273600"/>
+            <a:ext cx="3198960" cy="272880"/>
           </a:xfrm>
           <a:prstGeom prst="rect">
             <a:avLst/>
@@ -15651,7 +15624,7 @@
         <p:spPr>
           <a:xfrm>
             <a:off x="6492240" y="1225440"/>
-            <a:ext cx="1096560" cy="273600"/>
+            <a:ext cx="1095840" cy="272880"/>
           </a:xfrm>
           <a:prstGeom prst="rect">
             <a:avLst/>
@@ -15708,7 +15681,7 @@
         <p:spPr>
           <a:xfrm>
             <a:off x="7635240" y="1225440"/>
-            <a:ext cx="1005120" cy="273600"/>
+            <a:ext cx="1004400" cy="272880"/>
           </a:xfrm>
           <a:prstGeom prst="rect">
             <a:avLst/>
@@ -15765,7 +15738,7 @@
         <p:spPr>
           <a:xfrm>
             <a:off x="5577840" y="1536120"/>
-            <a:ext cx="3199680" cy="474840"/>
+            <a:ext cx="3198960" cy="474120"/>
           </a:xfrm>
           <a:prstGeom prst="rect">
             <a:avLst/>
@@ -15814,7 +15787,7 @@
         <p:spPr>
           <a:xfrm>
             <a:off x="5650920" y="1536120"/>
-            <a:ext cx="867960" cy="474840"/>
+            <a:ext cx="867240" cy="474120"/>
           </a:xfrm>
           <a:prstGeom prst="rect">
             <a:avLst/>
@@ -15871,7 +15844,7 @@
         <p:spPr>
           <a:xfrm>
             <a:off x="6537960" y="1536120"/>
-            <a:ext cx="1050840" cy="474840"/>
+            <a:ext cx="1050120" cy="474120"/>
           </a:xfrm>
           <a:prstGeom prst="rect">
             <a:avLst/>
@@ -15928,7 +15901,7 @@
         <p:spPr>
           <a:xfrm>
             <a:off x="7635240" y="1536120"/>
-            <a:ext cx="1050840" cy="474840"/>
+            <a:ext cx="1050120" cy="474120"/>
           </a:xfrm>
           <a:prstGeom prst="rect">
             <a:avLst/>
@@ -15985,7 +15958,7 @@
         <p:spPr>
           <a:xfrm>
             <a:off x="5577840" y="2057400"/>
-            <a:ext cx="3199680" cy="474840"/>
+            <a:ext cx="3198960" cy="474120"/>
           </a:xfrm>
           <a:prstGeom prst="rect">
             <a:avLst/>
@@ -16034,7 +16007,7 @@
         <p:spPr>
           <a:xfrm>
             <a:off x="5650920" y="2057400"/>
-            <a:ext cx="867960" cy="474840"/>
+            <a:ext cx="867240" cy="474120"/>
           </a:xfrm>
           <a:prstGeom prst="rect">
             <a:avLst/>
@@ -16091,7 +16064,7 @@
         <p:spPr>
           <a:xfrm>
             <a:off x="6537960" y="2057400"/>
-            <a:ext cx="1050840" cy="474840"/>
+            <a:ext cx="1050120" cy="474120"/>
           </a:xfrm>
           <a:prstGeom prst="rect">
             <a:avLst/>
@@ -16148,7 +16121,7 @@
         <p:spPr>
           <a:xfrm>
             <a:off x="7635240" y="2057400"/>
-            <a:ext cx="1050840" cy="474840"/>
+            <a:ext cx="1050120" cy="474120"/>
           </a:xfrm>
           <a:prstGeom prst="rect">
             <a:avLst/>
@@ -16215,7 +16188,7 @@
         <p:spPr>
           <a:xfrm>
             <a:off x="5577840" y="2578680"/>
-            <a:ext cx="3199680" cy="474840"/>
+            <a:ext cx="3198960" cy="474120"/>
           </a:xfrm>
           <a:prstGeom prst="rect">
             <a:avLst/>
@@ -16264,7 +16237,7 @@
         <p:spPr>
           <a:xfrm>
             <a:off x="5650920" y="2578680"/>
-            <a:ext cx="867960" cy="474840"/>
+            <a:ext cx="867240" cy="474120"/>
           </a:xfrm>
           <a:prstGeom prst="rect">
             <a:avLst/>
@@ -16321,7 +16294,7 @@
         <p:spPr>
           <a:xfrm>
             <a:off x="6537960" y="2578680"/>
-            <a:ext cx="1050840" cy="474840"/>
+            <a:ext cx="1050120" cy="474120"/>
           </a:xfrm>
           <a:prstGeom prst="rect">
             <a:avLst/>
@@ -16378,7 +16351,7 @@
         <p:spPr>
           <a:xfrm>
             <a:off x="7635240" y="2578680"/>
-            <a:ext cx="1050840" cy="474840"/>
+            <a:ext cx="1050120" cy="474120"/>
           </a:xfrm>
           <a:prstGeom prst="rect">
             <a:avLst/>
@@ -16435,7 +16408,7 @@
         <p:spPr>
           <a:xfrm>
             <a:off x="5577840" y="3099960"/>
-            <a:ext cx="3199680" cy="474840"/>
+            <a:ext cx="3198960" cy="474120"/>
           </a:xfrm>
           <a:prstGeom prst="rect">
             <a:avLst/>
@@ -16484,7 +16457,7 @@
         <p:spPr>
           <a:xfrm>
             <a:off x="5650920" y="3099960"/>
-            <a:ext cx="867960" cy="474840"/>
+            <a:ext cx="867240" cy="474120"/>
           </a:xfrm>
           <a:prstGeom prst="rect">
             <a:avLst/>
@@ -16541,7 +16514,7 @@
         <p:spPr>
           <a:xfrm>
             <a:off x="6537960" y="3099960"/>
-            <a:ext cx="1050840" cy="474840"/>
+            <a:ext cx="1050120" cy="474120"/>
           </a:xfrm>
           <a:prstGeom prst="rect">
             <a:avLst/>
@@ -16598,7 +16571,7 @@
         <p:spPr>
           <a:xfrm>
             <a:off x="7635240" y="3099960"/>
-            <a:ext cx="1050840" cy="474840"/>
+            <a:ext cx="1050120" cy="474120"/>
           </a:xfrm>
           <a:prstGeom prst="rect">
             <a:avLst/>
@@ -16655,7 +16628,7 @@
         <p:spPr>
           <a:xfrm>
             <a:off x="5577840" y="3620880"/>
-            <a:ext cx="3199680" cy="474840"/>
+            <a:ext cx="3198960" cy="474120"/>
           </a:xfrm>
           <a:prstGeom prst="rect">
             <a:avLst/>
@@ -16704,7 +16677,7 @@
         <p:spPr>
           <a:xfrm>
             <a:off x="5650920" y="3620880"/>
-            <a:ext cx="867960" cy="474840"/>
+            <a:ext cx="867240" cy="474120"/>
           </a:xfrm>
           <a:prstGeom prst="rect">
             <a:avLst/>
@@ -16761,7 +16734,7 @@
         <p:spPr>
           <a:xfrm>
             <a:off x="6537960" y="3620880"/>
-            <a:ext cx="1050840" cy="474840"/>
+            <a:ext cx="1050120" cy="474120"/>
           </a:xfrm>
           <a:prstGeom prst="rect">
             <a:avLst/>
@@ -16818,7 +16791,7 @@
         <p:spPr>
           <a:xfrm>
             <a:off x="7635240" y="3620880"/>
-            <a:ext cx="1050840" cy="474840"/>
+            <a:ext cx="1050120" cy="474120"/>
           </a:xfrm>
           <a:prstGeom prst="rect">
             <a:avLst/>
@@ -16875,7 +16848,7 @@
         <p:spPr>
           <a:xfrm>
             <a:off x="5577840" y="4142160"/>
-            <a:ext cx="3199680" cy="474840"/>
+            <a:ext cx="3198960" cy="474120"/>
           </a:xfrm>
           <a:prstGeom prst="rect">
             <a:avLst/>
@@ -16924,7 +16897,7 @@
         <p:spPr>
           <a:xfrm>
             <a:off x="5650920" y="4142160"/>
-            <a:ext cx="867960" cy="474840"/>
+            <a:ext cx="867240" cy="474120"/>
           </a:xfrm>
           <a:prstGeom prst="rect">
             <a:avLst/>
@@ -16981,7 +16954,7 @@
         <p:spPr>
           <a:xfrm>
             <a:off x="6537960" y="4142160"/>
-            <a:ext cx="1050840" cy="474840"/>
+            <a:ext cx="1050120" cy="474120"/>
           </a:xfrm>
           <a:prstGeom prst="rect">
             <a:avLst/>
@@ -17038,7 +17011,7 @@
         <p:spPr>
           <a:xfrm>
             <a:off x="7635240" y="4142160"/>
-            <a:ext cx="1050840" cy="474840"/>
+            <a:ext cx="1050120" cy="474120"/>
           </a:xfrm>
           <a:prstGeom prst="rect">
             <a:avLst/>
@@ -17095,7 +17068,7 @@
         <p:spPr>
           <a:xfrm>
             <a:off x="0" y="4937760"/>
-            <a:ext cx="9143280" cy="205200"/>
+            <a:ext cx="9142560" cy="204480"/>
           </a:xfrm>
           <a:prstGeom prst="rect">
             <a:avLst/>
@@ -17144,7 +17117,7 @@
         <p:spPr>
           <a:xfrm>
             <a:off x="365760" y="4937760"/>
-            <a:ext cx="8411760" cy="205200"/>
+            <a:ext cx="8411040" cy="204480"/>
           </a:xfrm>
           <a:prstGeom prst="rect">
             <a:avLst/>
@@ -17238,7 +17211,7 @@
         <p:spPr>
           <a:xfrm>
             <a:off x="0" y="0"/>
-            <a:ext cx="9143280" cy="657720"/>
+            <a:ext cx="9142560" cy="657000"/>
           </a:xfrm>
           <a:prstGeom prst="rect">
             <a:avLst/>
@@ -17287,7 +17260,7 @@
         <p:spPr>
           <a:xfrm>
             <a:off x="274320" y="91440"/>
-            <a:ext cx="410760" cy="474840"/>
+            <a:ext cx="410040" cy="474120"/>
           </a:xfrm>
           <a:prstGeom prst="rect">
             <a:avLst/>
@@ -17344,7 +17317,7 @@
         <p:spPr>
           <a:xfrm>
             <a:off x="804600" y="64080"/>
-            <a:ext cx="8046000" cy="346680"/>
+            <a:ext cx="8045280" cy="345960"/>
           </a:xfrm>
           <a:prstGeom prst="rect">
             <a:avLst/>
@@ -17401,7 +17374,7 @@
         <p:spPr>
           <a:xfrm>
             <a:off x="365760" y="768240"/>
-            <a:ext cx="8411760" cy="236880"/>
+            <a:ext cx="8411040" cy="236160"/>
           </a:xfrm>
           <a:prstGeom prst="rect">
             <a:avLst/>
@@ -17458,7 +17431,7 @@
         <p:spPr>
           <a:xfrm>
             <a:off x="365760" y="1078920"/>
-            <a:ext cx="8411760" cy="1169640"/>
+            <a:ext cx="8411040" cy="1168920"/>
           </a:xfrm>
           <a:prstGeom prst="rect">
             <a:avLst/>
@@ -17507,7 +17480,7 @@
         <p:spPr>
           <a:xfrm>
             <a:off x="365760" y="1078920"/>
-            <a:ext cx="54000" cy="1169640"/>
+            <a:ext cx="53280" cy="1168920"/>
           </a:xfrm>
           <a:prstGeom prst="rect">
             <a:avLst/>
@@ -17556,7 +17529,7 @@
         <p:spPr>
           <a:xfrm>
             <a:off x="567000" y="1152000"/>
-            <a:ext cx="7954560" cy="255240"/>
+            <a:ext cx="7953840" cy="254520"/>
           </a:xfrm>
           <a:prstGeom prst="rect">
             <a:avLst/>
@@ -17613,7 +17586,7 @@
         <p:spPr>
           <a:xfrm>
             <a:off x="567000" y="1435680"/>
-            <a:ext cx="7954560" cy="730800"/>
+            <a:ext cx="7953840" cy="730080"/>
           </a:xfrm>
           <a:prstGeom prst="rect">
             <a:avLst/>
@@ -17670,7 +17643,7 @@
         <p:spPr>
           <a:xfrm>
             <a:off x="365760" y="2395800"/>
-            <a:ext cx="8411760" cy="328320"/>
+            <a:ext cx="8411040" cy="327600"/>
           </a:xfrm>
           <a:prstGeom prst="rect">
             <a:avLst/>
@@ -17719,7 +17692,7 @@
         <p:spPr>
           <a:xfrm>
             <a:off x="502920" y="2395800"/>
-            <a:ext cx="2468160" cy="328320"/>
+            <a:ext cx="2467440" cy="327600"/>
           </a:xfrm>
           <a:prstGeom prst="rect">
             <a:avLst/>
@@ -17776,7 +17749,7 @@
         <p:spPr>
           <a:xfrm>
             <a:off x="3108960" y="2395800"/>
-            <a:ext cx="3382560" cy="328320"/>
+            <a:ext cx="3381840" cy="327600"/>
           </a:xfrm>
           <a:prstGeom prst="rect">
             <a:avLst/>
@@ -17833,7 +17806,7 @@
         <p:spPr>
           <a:xfrm>
             <a:off x="6675120" y="2395800"/>
-            <a:ext cx="1919520" cy="328320"/>
+            <a:ext cx="1918800" cy="327600"/>
           </a:xfrm>
           <a:prstGeom prst="rect">
             <a:avLst/>
@@ -17890,7 +17863,7 @@
         <p:spPr>
           <a:xfrm>
             <a:off x="365760" y="2770560"/>
-            <a:ext cx="8411760" cy="456480"/>
+            <a:ext cx="8411040" cy="455760"/>
           </a:xfrm>
           <a:prstGeom prst="rect">
             <a:avLst/>
@@ -17939,7 +17912,7 @@
         <p:spPr>
           <a:xfrm>
             <a:off x="502920" y="2770560"/>
-            <a:ext cx="2468160" cy="456480"/>
+            <a:ext cx="2467440" cy="455760"/>
           </a:xfrm>
           <a:prstGeom prst="rect">
             <a:avLst/>
@@ -17996,7 +17969,7 @@
         <p:spPr>
           <a:xfrm>
             <a:off x="3108960" y="2770560"/>
-            <a:ext cx="3382560" cy="456480"/>
+            <a:ext cx="3381840" cy="455760"/>
           </a:xfrm>
           <a:prstGeom prst="rect">
             <a:avLst/>
@@ -18053,7 +18026,7 @@
         <p:spPr>
           <a:xfrm>
             <a:off x="6675120" y="2862000"/>
-            <a:ext cx="1919520" cy="255240"/>
+            <a:ext cx="1918800" cy="254520"/>
           </a:xfrm>
           <a:prstGeom prst="rect">
             <a:avLst/>
@@ -18102,7 +18075,7 @@
         <p:spPr>
           <a:xfrm>
             <a:off x="6675120" y="2862000"/>
-            <a:ext cx="1919520" cy="255240"/>
+            <a:ext cx="1918800" cy="254520"/>
           </a:xfrm>
           <a:prstGeom prst="rect">
             <a:avLst/>
@@ -18159,7 +18132,7 @@
         <p:spPr>
           <a:xfrm>
             <a:off x="365760" y="3273480"/>
-            <a:ext cx="8411760" cy="456480"/>
+            <a:ext cx="8411040" cy="455760"/>
           </a:xfrm>
           <a:prstGeom prst="rect">
             <a:avLst/>
@@ -18208,7 +18181,7 @@
         <p:spPr>
           <a:xfrm>
             <a:off x="502920" y="3273480"/>
-            <a:ext cx="2468160" cy="456480"/>
+            <a:ext cx="2467440" cy="455760"/>
           </a:xfrm>
           <a:prstGeom prst="rect">
             <a:avLst/>
@@ -18265,7 +18238,7 @@
         <p:spPr>
           <a:xfrm>
             <a:off x="3108960" y="3273480"/>
-            <a:ext cx="3382560" cy="456480"/>
+            <a:ext cx="3381840" cy="455760"/>
           </a:xfrm>
           <a:prstGeom prst="rect">
             <a:avLst/>
@@ -18322,7 +18295,7 @@
         <p:spPr>
           <a:xfrm>
             <a:off x="6675120" y="3364920"/>
-            <a:ext cx="1919520" cy="255240"/>
+            <a:ext cx="1918800" cy="254520"/>
           </a:xfrm>
           <a:prstGeom prst="rect">
             <a:avLst/>
@@ -18371,7 +18344,7 @@
         <p:spPr>
           <a:xfrm>
             <a:off x="6675120" y="3364920"/>
-            <a:ext cx="1919520" cy="255240"/>
+            <a:ext cx="1918800" cy="254520"/>
           </a:xfrm>
           <a:prstGeom prst="rect">
             <a:avLst/>
@@ -18428,7 +18401,7 @@
         <p:spPr>
           <a:xfrm>
             <a:off x="365760" y="3776400"/>
-            <a:ext cx="8411760" cy="456480"/>
+            <a:ext cx="8411040" cy="455760"/>
           </a:xfrm>
           <a:prstGeom prst="rect">
             <a:avLst/>
@@ -18477,7 +18450,7 @@
         <p:spPr>
           <a:xfrm>
             <a:off x="365760" y="3776400"/>
-            <a:ext cx="49680" cy="456480"/>
+            <a:ext cx="48960" cy="455760"/>
           </a:xfrm>
           <a:prstGeom prst="rect">
             <a:avLst/>
@@ -18526,7 +18499,7 @@
         <p:spPr>
           <a:xfrm>
             <a:off x="502920" y="3776400"/>
-            <a:ext cx="2468160" cy="456480"/>
+            <a:ext cx="2467440" cy="455760"/>
           </a:xfrm>
           <a:prstGeom prst="rect">
             <a:avLst/>
@@ -18583,7 +18556,7 @@
         <p:spPr>
           <a:xfrm>
             <a:off x="3108960" y="3776400"/>
-            <a:ext cx="3382560" cy="456480"/>
+            <a:ext cx="3381840" cy="455760"/>
           </a:xfrm>
           <a:prstGeom prst="rect">
             <a:avLst/>
@@ -18640,7 +18613,7 @@
         <p:spPr>
           <a:xfrm>
             <a:off x="6675120" y="3867840"/>
-            <a:ext cx="1919520" cy="255240"/>
+            <a:ext cx="1918800" cy="254520"/>
           </a:xfrm>
           <a:prstGeom prst="rect">
             <a:avLst/>
@@ -18689,7 +18662,7 @@
         <p:spPr>
           <a:xfrm>
             <a:off x="6675120" y="3867840"/>
-            <a:ext cx="1919520" cy="255240"/>
+            <a:ext cx="1918800" cy="254520"/>
           </a:xfrm>
           <a:prstGeom prst="rect">
             <a:avLst/>
@@ -18746,7 +18719,7 @@
         <p:spPr>
           <a:xfrm>
             <a:off x="365760" y="4279320"/>
-            <a:ext cx="8411760" cy="456480"/>
+            <a:ext cx="8411040" cy="455760"/>
           </a:xfrm>
           <a:prstGeom prst="rect">
             <a:avLst/>
@@ -18795,7 +18768,7 @@
         <p:spPr>
           <a:xfrm>
             <a:off x="365760" y="4279320"/>
-            <a:ext cx="49680" cy="456480"/>
+            <a:ext cx="48960" cy="455760"/>
           </a:xfrm>
           <a:prstGeom prst="rect">
             <a:avLst/>
@@ -18844,7 +18817,7 @@
         <p:spPr>
           <a:xfrm>
             <a:off x="502920" y="4279320"/>
-            <a:ext cx="2468160" cy="456480"/>
+            <a:ext cx="2467440" cy="455760"/>
           </a:xfrm>
           <a:prstGeom prst="rect">
             <a:avLst/>
@@ -18901,7 +18874,7 @@
         <p:spPr>
           <a:xfrm>
             <a:off x="3108960" y="4279320"/>
-            <a:ext cx="3382560" cy="456480"/>
+            <a:ext cx="3381840" cy="455760"/>
           </a:xfrm>
           <a:prstGeom prst="rect">
             <a:avLst/>
@@ -18958,7 +18931,7 @@
         <p:spPr>
           <a:xfrm>
             <a:off x="6675120" y="4370760"/>
-            <a:ext cx="1919520" cy="255240"/>
+            <a:ext cx="1918800" cy="254520"/>
           </a:xfrm>
           <a:prstGeom prst="rect">
             <a:avLst/>
@@ -19007,7 +18980,7 @@
         <p:spPr>
           <a:xfrm>
             <a:off x="6675120" y="4370760"/>
-            <a:ext cx="1919520" cy="255240"/>
+            <a:ext cx="1918800" cy="254520"/>
           </a:xfrm>
           <a:prstGeom prst="rect">
             <a:avLst/>
@@ -19064,7 +19037,7 @@
         <p:spPr>
           <a:xfrm>
             <a:off x="0" y="4937760"/>
-            <a:ext cx="9143280" cy="205200"/>
+            <a:ext cx="9142560" cy="204480"/>
           </a:xfrm>
           <a:prstGeom prst="rect">
             <a:avLst/>
@@ -19113,7 +19086,7 @@
         <p:spPr>
           <a:xfrm>
             <a:off x="365760" y="4937760"/>
-            <a:ext cx="8411760" cy="205200"/>
+            <a:ext cx="8411040" cy="204480"/>
           </a:xfrm>
           <a:prstGeom prst="rect">
             <a:avLst/>
@@ -19207,7 +19180,7 @@
         <p:spPr>
           <a:xfrm>
             <a:off x="0" y="0"/>
-            <a:ext cx="9143280" cy="657720"/>
+            <a:ext cx="9142560" cy="657000"/>
           </a:xfrm>
           <a:prstGeom prst="rect">
             <a:avLst/>
@@ -19256,7 +19229,7 @@
         <p:spPr>
           <a:xfrm>
             <a:off x="274320" y="91440"/>
-            <a:ext cx="410760" cy="474840"/>
+            <a:ext cx="410040" cy="474120"/>
           </a:xfrm>
           <a:prstGeom prst="rect">
             <a:avLst/>
@@ -19313,7 +19286,7 @@
         <p:spPr>
           <a:xfrm>
             <a:off x="804600" y="64080"/>
-            <a:ext cx="8046000" cy="346680"/>
+            <a:ext cx="8045280" cy="345960"/>
           </a:xfrm>
           <a:prstGeom prst="rect">
             <a:avLst/>
@@ -19370,7 +19343,7 @@
         <p:spPr>
           <a:xfrm>
             <a:off x="365760" y="720000"/>
-            <a:ext cx="8411760" cy="950400"/>
+            <a:ext cx="8411040" cy="949680"/>
           </a:xfrm>
           <a:prstGeom prst="rect">
             <a:avLst/>
@@ -19419,7 +19392,7 @@
         <p:spPr>
           <a:xfrm>
             <a:off x="365760" y="720000"/>
-            <a:ext cx="54000" cy="950400"/>
+            <a:ext cx="53280" cy="949680"/>
           </a:xfrm>
           <a:prstGeom prst="rect">
             <a:avLst/>
@@ -19468,7 +19441,7 @@
         <p:spPr>
           <a:xfrm>
             <a:off x="1060560" y="824400"/>
-            <a:ext cx="7405920" cy="255240"/>
+            <a:ext cx="7405200" cy="254520"/>
           </a:xfrm>
           <a:prstGeom prst="rect">
             <a:avLst/>
@@ -19525,7 +19498,7 @@
         <p:spPr>
           <a:xfrm>
             <a:off x="1060560" y="1207080"/>
-            <a:ext cx="7405920" cy="474840"/>
+            <a:ext cx="7405200" cy="474120"/>
           </a:xfrm>
           <a:prstGeom prst="rect">
             <a:avLst/>
@@ -19582,7 +19555,7 @@
         <p:spPr>
           <a:xfrm>
             <a:off x="365760" y="1749240"/>
-            <a:ext cx="8411760" cy="950400"/>
+            <a:ext cx="8411040" cy="949680"/>
           </a:xfrm>
           <a:prstGeom prst="rect">
             <a:avLst/>
@@ -19631,7 +19604,7 @@
         <p:spPr>
           <a:xfrm>
             <a:off x="365760" y="1755360"/>
-            <a:ext cx="54000" cy="950400"/>
+            <a:ext cx="53280" cy="949680"/>
           </a:xfrm>
           <a:prstGeom prst="rect">
             <a:avLst/>
@@ -19680,7 +19653,7 @@
         <p:spPr>
           <a:xfrm>
             <a:off x="567000" y="1800000"/>
-            <a:ext cx="383400" cy="522000"/>
+            <a:ext cx="382680" cy="521280"/>
           </a:xfrm>
           <a:prstGeom prst="rect">
             <a:avLst/>
@@ -19727,7 +19700,7 @@
         <p:spPr>
           <a:xfrm>
             <a:off x="1060560" y="1956960"/>
-            <a:ext cx="7405920" cy="255240"/>
+            <a:ext cx="7405200" cy="254520"/>
           </a:xfrm>
           <a:prstGeom prst="rect">
             <a:avLst/>
@@ -19784,7 +19757,7 @@
         <p:spPr>
           <a:xfrm>
             <a:off x="1060560" y="2267640"/>
-            <a:ext cx="7405920" cy="474840"/>
+            <a:ext cx="7405200" cy="474120"/>
           </a:xfrm>
           <a:prstGeom prst="rect">
             <a:avLst/>
@@ -19841,7 +19814,7 @@
         <p:spPr>
           <a:xfrm>
             <a:off x="365760" y="2829240"/>
-            <a:ext cx="8411760" cy="950400"/>
+            <a:ext cx="8411040" cy="949680"/>
           </a:xfrm>
           <a:prstGeom prst="rect">
             <a:avLst/>
@@ -19890,7 +19863,7 @@
         <p:spPr>
           <a:xfrm>
             <a:off x="365760" y="2829240"/>
-            <a:ext cx="54000" cy="950400"/>
+            <a:ext cx="53280" cy="949680"/>
           </a:xfrm>
           <a:prstGeom prst="rect">
             <a:avLst/>
@@ -19939,7 +19912,7 @@
         <p:spPr>
           <a:xfrm>
             <a:off x="1060560" y="3017520"/>
-            <a:ext cx="7405920" cy="255240"/>
+            <a:ext cx="7405200" cy="254520"/>
           </a:xfrm>
           <a:prstGeom prst="rect">
             <a:avLst/>
@@ -19996,7 +19969,7 @@
         <p:spPr>
           <a:xfrm>
             <a:off x="1060560" y="3328560"/>
-            <a:ext cx="7405920" cy="474840"/>
+            <a:ext cx="7405200" cy="474120"/>
           </a:xfrm>
           <a:prstGeom prst="rect">
             <a:avLst/>
@@ -20053,7 +20026,7 @@
         <p:spPr>
           <a:xfrm>
             <a:off x="360000" y="3909240"/>
-            <a:ext cx="8411760" cy="950400"/>
+            <a:ext cx="8411040" cy="949680"/>
           </a:xfrm>
           <a:prstGeom prst="rect">
             <a:avLst/>
@@ -20102,7 +20075,7 @@
         <p:spPr>
           <a:xfrm>
             <a:off x="365760" y="3909240"/>
-            <a:ext cx="54000" cy="950400"/>
+            <a:ext cx="53280" cy="949680"/>
           </a:xfrm>
           <a:prstGeom prst="rect">
             <a:avLst/>
@@ -20151,7 +20124,7 @@
         <p:spPr>
           <a:xfrm>
             <a:off x="567000" y="4060080"/>
-            <a:ext cx="383400" cy="383400"/>
+            <a:ext cx="382680" cy="382680"/>
           </a:xfrm>
           <a:prstGeom prst="rect">
             <a:avLst/>
@@ -20198,7 +20171,7 @@
         <p:spPr>
           <a:xfrm>
             <a:off x="1060560" y="3960000"/>
-            <a:ext cx="7405920" cy="255240"/>
+            <a:ext cx="7405200" cy="254520"/>
           </a:xfrm>
           <a:prstGeom prst="rect">
             <a:avLst/>
@@ -20255,7 +20228,7 @@
         <p:spPr>
           <a:xfrm>
             <a:off x="1060560" y="4389120"/>
-            <a:ext cx="7405920" cy="474840"/>
+            <a:ext cx="7405200" cy="474120"/>
           </a:xfrm>
           <a:prstGeom prst="rect">
             <a:avLst/>
@@ -20312,7 +20285,7 @@
         <p:spPr>
           <a:xfrm>
             <a:off x="0" y="4892040"/>
-            <a:ext cx="9143280" cy="250920"/>
+            <a:ext cx="9142560" cy="250200"/>
           </a:xfrm>
           <a:prstGeom prst="rect">
             <a:avLst/>
@@ -20361,7 +20334,7 @@
         <p:spPr>
           <a:xfrm>
             <a:off x="274320" y="4892040"/>
-            <a:ext cx="8686080" cy="250920"/>
+            <a:ext cx="8685360" cy="250200"/>
           </a:xfrm>
           <a:prstGeom prst="rect">
             <a:avLst/>
